--- a/桌面交付包/10_发危建平总版/元谷2万方招商策略汇报(危建平总汇报版).pptx
+++ b/桌面交付包/10_发危建平总版/元谷2万方招商策略汇报(危建平总汇报版).pptx
@@ -28,6 +28,8 @@
     <p:sldId id="276" r:id="rId27"/>
     <p:sldId id="277" r:id="rId28"/>
     <p:sldId id="278" r:id="rId29"/>
+    <p:sldId id="279" r:id="rId30"/>
+    <p:sldId id="280" r:id="rId31"/>
   </p:sldIdLst>
   <p:sldSz cx="12191695" cy="6858000" type="screen4x3"/>
   <p:notesSz cx="6858000" cy="9144000"/>
@@ -16177,6 +16179,50 @@
             <a:avLst/>
           </a:prstGeom>
           <a:solidFill>
+            <a:srgbClr val="F4F6FA"/>
+          </a:solidFill>
+          <a:ln>
+            <a:noFill/>
+          </a:ln>
+          <a:effectLst/>
+        </p:spPr>
+        <p:style>
+          <a:lnRef idx="1">
+            <a:schemeClr val="accent1"/>
+          </a:lnRef>
+          <a:fillRef idx="3">
+            <a:schemeClr val="accent1"/>
+          </a:fillRef>
+          <a:effectRef idx="2">
+            <a:schemeClr val="accent1"/>
+          </a:effectRef>
+          <a:fontRef idx="minor">
+            <a:schemeClr val="lt1"/>
+          </a:fontRef>
+        </p:style>
+        <p:txBody>
+          <a:bodyPr rtlCol="0" anchor="ctr"/>
+          <a:lstStyle/>
+          <a:p>
+            <a:pPr algn="ctr"/>
+          </a:p>
+        </p:txBody>
+      </p:sp>
+      <p:sp>
+        <p:nvSpPr>
+          <p:cNvPr id="3" name="Rectangle 2"/>
+          <p:cNvSpPr/>
+          <p:nvPr/>
+        </p:nvSpPr>
+        <p:spPr>
+          <a:xfrm>
+            <a:off x="0" y="0"/>
+            <a:ext cx="12191695" cy="1051560"/>
+          </a:xfrm>
+          <a:prstGeom prst="rect">
+            <a:avLst/>
+          </a:prstGeom>
+          <a:solidFill>
             <a:srgbClr val="0F244E"/>
           </a:solidFill>
           <a:ln>
@@ -16208,60 +16254,16 @@
       </p:sp>
       <p:sp>
         <p:nvSpPr>
-          <p:cNvPr id="3" name="Rectangle 2"/>
+          <p:cNvPr id="4" name="Rectangle 3"/>
           <p:cNvSpPr/>
           <p:nvPr/>
         </p:nvSpPr>
         <p:spPr>
           <a:xfrm>
-            <a:off x="0" y="0"/>
-            <a:ext cx="4206240" cy="6858000"/>
-          </a:xfrm>
-          <a:prstGeom prst="rect">
-            <a:avLst/>
-          </a:prstGeom>
-          <a:solidFill>
-            <a:srgbClr val="1B3A6B"/>
-          </a:solidFill>
-          <a:ln>
-            <a:noFill/>
-          </a:ln>
-          <a:effectLst/>
-        </p:spPr>
-        <p:style>
-          <a:lnRef idx="1">
-            <a:schemeClr val="accent1"/>
-          </a:lnRef>
-          <a:fillRef idx="3">
-            <a:schemeClr val="accent1"/>
-          </a:fillRef>
-          <a:effectRef idx="2">
-            <a:schemeClr val="accent1"/>
-          </a:effectRef>
-          <a:fontRef idx="minor">
-            <a:schemeClr val="lt1"/>
-          </a:fontRef>
-        </p:style>
-        <p:txBody>
-          <a:bodyPr rtlCol="0" anchor="ctr"/>
-          <a:lstStyle/>
-          <a:p>
-            <a:pPr algn="ctr"/>
-          </a:p>
-        </p:txBody>
-      </p:sp>
-      <p:sp>
-        <p:nvSpPr>
-          <p:cNvPr id="4" name="Oval 3"/>
-          <p:cNvSpPr/>
-          <p:nvPr/>
-        </p:nvSpPr>
-        <p:spPr>
-          <a:xfrm>
-            <a:off x="822960" y="1828800"/>
-            <a:ext cx="822960" cy="822960"/>
-          </a:xfrm>
-          <a:prstGeom prst="ellipse">
+            <a:off x="0" y="1051560"/>
+            <a:ext cx="12191695" cy="54864"/>
+          </a:xfrm>
+          <a:prstGeom prst="rect">
             <a:avLst/>
           </a:prstGeom>
           <a:solidFill>
@@ -16296,122 +16298,16 @@
       </p:sp>
       <p:sp>
         <p:nvSpPr>
-          <p:cNvPr id="5" name="TextBox 4"/>
-          <p:cNvSpPr txBox="1"/>
-          <p:nvPr/>
-        </p:nvSpPr>
-        <p:spPr>
-          <a:xfrm>
-            <a:off x="822960" y="1828800"/>
-            <a:ext cx="822960" cy="822960"/>
-          </a:xfrm>
-          <a:prstGeom prst="rect">
-            <a:avLst/>
-          </a:prstGeom>
-          <a:noFill/>
-        </p:spPr>
-        <p:txBody>
-          <a:bodyPr wrap="square" anchor="ctr" lIns="0" rIns="0" tIns="0" bIns="0">
-            <a:spAutoFit/>
-          </a:bodyPr>
-          <a:lstStyle/>
-          <a:p>
-            <a:pPr algn="ctr">
-              <a:spcBef>
-                <a:spcPts val="0"/>
-              </a:spcBef>
-              <a:spcAft>
-                <a:spcPts val="300"/>
-              </a:spcAft>
-            </a:pPr>
-            <a:r>
-              <a:rPr sz="2600" b="1">
-                <a:solidFill>
-                  <a:srgbClr val="FFFFFF"/>
-                </a:solidFill>
-                <a:latin typeface="微软雅黑"/>
-                <a:ea typeface="微软雅黑"/>
-              </a:rPr>
-              <a:t>06</a:t>
-            </a:r>
-          </a:p>
-        </p:txBody>
-      </p:sp>
-      <p:sp>
-        <p:nvSpPr>
-          <p:cNvPr id="6" name="TextBox 5"/>
-          <p:cNvSpPr txBox="1"/>
-          <p:nvPr/>
-        </p:nvSpPr>
-        <p:spPr>
-          <a:xfrm>
-            <a:off x="822960" y="2880360"/>
-            <a:ext cx="3108960" cy="1463040"/>
-          </a:xfrm>
-          <a:prstGeom prst="rect">
-            <a:avLst/>
-          </a:prstGeom>
-          <a:noFill/>
-        </p:spPr>
-        <p:txBody>
-          <a:bodyPr wrap="square" anchor="t" lIns="0" rIns="0" tIns="0" bIns="0">
-            <a:spAutoFit/>
-          </a:bodyPr>
-          <a:lstStyle/>
-          <a:p>
-            <a:pPr algn="l">
-              <a:spcBef>
-                <a:spcPts val="0"/>
-              </a:spcBef>
-              <a:spcAft>
-                <a:spcPts val="300"/>
-              </a:spcAft>
-            </a:pPr>
-            <a:r>
-              <a:rPr sz="2800" b="1">
-                <a:solidFill>
-                  <a:srgbClr val="FFFFFF"/>
-                </a:solidFill>
-                <a:latin typeface="微软雅黑"/>
-                <a:ea typeface="微软雅黑"/>
-              </a:rPr>
-              <a:t>服务费用与价值</a:t>
-            </a:r>
-          </a:p>
-          <a:p>
-            <a:pPr algn="l">
-              <a:spcBef>
-                <a:spcPts val="0"/>
-              </a:spcBef>
-              <a:spcAft>
-                <a:spcPts val="0"/>
-              </a:spcAft>
-            </a:pPr>
-            <a:r>
-              <a:rPr sz="1150" b="0">
-                <a:solidFill>
-                  <a:srgbClr val="9FB2D0"/>
-                </a:solidFill>
-                <a:latin typeface="微软雅黑"/>
-                <a:ea typeface="微软雅黑"/>
-              </a:rPr>
-              <a:t>FEES &amp; VALUE</a:t>
-            </a:r>
-          </a:p>
-        </p:txBody>
-      </p:sp>
-      <p:sp>
-        <p:nvSpPr>
-          <p:cNvPr id="7" name="Oval 6"/>
+          <p:cNvPr id="5" name="Rectangle 4"/>
           <p:cNvSpPr/>
           <p:nvPr/>
         </p:nvSpPr>
         <p:spPr>
           <a:xfrm>
-            <a:off x="4937760" y="2029968"/>
-            <a:ext cx="146304" cy="146304"/>
-          </a:xfrm>
-          <a:prstGeom prst="ellipse">
+            <a:off x="502920" y="237744"/>
+            <a:ext cx="109728" cy="566928"/>
+          </a:xfrm>
+          <a:prstGeom prst="rect">
             <a:avLst/>
           </a:prstGeom>
           <a:solidFill>
@@ -16446,14 +16342,14 @@
       </p:sp>
       <p:sp>
         <p:nvSpPr>
-          <p:cNvPr id="8" name="TextBox 7"/>
+          <p:cNvPr id="6" name="TextBox 5"/>
           <p:cNvSpPr txBox="1"/>
           <p:nvPr/>
         </p:nvSpPr>
         <p:spPr>
           <a:xfrm>
-            <a:off x="5303520" y="1920240"/>
-            <a:ext cx="6309360" cy="548640"/>
+            <a:off x="777240" y="182880"/>
+            <a:ext cx="10241280" cy="310896"/>
           </a:xfrm>
           <a:prstGeom prst="rect">
             <a:avLst/>
@@ -16475,30 +16371,501 @@
               </a:spcAft>
             </a:pPr>
             <a:r>
-              <a:rPr sz="1400" b="0">
-                <a:solidFill>
-                  <a:srgbClr val="E5EBF5"/>
-                </a:solidFill>
-                <a:latin typeface="微软雅黑"/>
-                <a:ea typeface="微软雅黑"/>
-              </a:rPr>
-              <a:t>已取消月费(不签对赌), 让项目方更轻装</a:t>
-            </a:r>
-          </a:p>
-        </p:txBody>
-      </p:sp>
-      <p:sp>
-        <p:nvSpPr>
-          <p:cNvPr id="9" name="Oval 8"/>
+              <a:rPr sz="1100" b="0">
+                <a:solidFill>
+                  <a:srgbClr val="B9C6DC"/>
+                </a:solidFill>
+                <a:latin typeface="微软雅黑"/>
+                <a:ea typeface="微软雅黑"/>
+              </a:rPr>
+              <a:t>05 · 品牌与活动</a:t>
+            </a:r>
+          </a:p>
+        </p:txBody>
+      </p:sp>
+      <p:sp>
+        <p:nvSpPr>
+          <p:cNvPr id="7" name="TextBox 6"/>
+          <p:cNvSpPr txBox="1"/>
+          <p:nvPr/>
+        </p:nvSpPr>
+        <p:spPr>
+          <a:xfrm>
+            <a:off x="777240" y="420624"/>
+            <a:ext cx="10424160" cy="548640"/>
+          </a:xfrm>
+          <a:prstGeom prst="rect">
+            <a:avLst/>
+          </a:prstGeom>
+          <a:noFill/>
+        </p:spPr>
+        <p:txBody>
+          <a:bodyPr wrap="square" anchor="t" lIns="0" rIns="0" tIns="0" bIns="0">
+            <a:spAutoFit/>
+          </a:bodyPr>
+          <a:lstStyle/>
+          <a:p>
+            <a:pPr algn="l">
+              <a:spcBef>
+                <a:spcPts val="0"/>
+              </a:spcBef>
+              <a:spcAft>
+                <a:spcPts val="300"/>
+              </a:spcAft>
+            </a:pPr>
+            <a:r>
+              <a:rPr sz="2200" b="1">
+                <a:solidFill>
+                  <a:srgbClr val="FFFFFF"/>
+                </a:solidFill>
+                <a:latin typeface="微软雅黑"/>
+                <a:ea typeface="微软雅黑"/>
+              </a:rPr>
+              <a:t>媒体宣传:为招商蓄势、为品牌立势</a:t>
+            </a:r>
+          </a:p>
+        </p:txBody>
+      </p:sp>
+      <p:sp>
+        <p:nvSpPr>
+          <p:cNvPr id="8" name="TextBox 7"/>
+          <p:cNvSpPr txBox="1"/>
+          <p:nvPr/>
+        </p:nvSpPr>
+        <p:spPr>
+          <a:xfrm>
+            <a:off x="9509760" y="182880"/>
+            <a:ext cx="2194560" cy="731520"/>
+          </a:xfrm>
+          <a:prstGeom prst="rect">
+            <a:avLst/>
+          </a:prstGeom>
+          <a:noFill/>
+        </p:spPr>
+        <p:txBody>
+          <a:bodyPr wrap="square" anchor="t" lIns="0" rIns="0" tIns="0" bIns="0">
+            <a:spAutoFit/>
+          </a:bodyPr>
+          <a:lstStyle/>
+          <a:p>
+            <a:pPr algn="r">
+              <a:spcBef>
+                <a:spcPts val="0"/>
+              </a:spcBef>
+              <a:spcAft>
+                <a:spcPts val="300"/>
+              </a:spcAft>
+            </a:pPr>
+            <a:r>
+              <a:rPr sz="1150" b="1">
+                <a:solidFill>
+                  <a:srgbClr val="E8C87A"/>
+                </a:solidFill>
+                <a:latin typeface="微软雅黑"/>
+                <a:ea typeface="微软雅黑"/>
+              </a:rPr>
+              <a:t>元谷 YUANGU</a:t>
+            </a:r>
+          </a:p>
+          <a:p>
+            <a:pPr algn="r">
+              <a:spcBef>
+                <a:spcPts val="0"/>
+              </a:spcBef>
+              <a:spcAft>
+                <a:spcPts val="300"/>
+              </a:spcAft>
+            </a:pPr>
+            <a:r>
+              <a:rPr sz="850" b="0">
+                <a:solidFill>
+                  <a:srgbClr val="B9C6DC"/>
+                </a:solidFill>
+                <a:latin typeface="微软雅黑"/>
+                <a:ea typeface="微软雅黑"/>
+              </a:rPr>
+              <a:t>胡教授团队 · 第三方服务</a:t>
+            </a:r>
+          </a:p>
+        </p:txBody>
+      </p:sp>
+      <p:sp>
+        <p:nvSpPr>
+          <p:cNvPr id="9" name="TextBox 8"/>
+          <p:cNvSpPr txBox="1"/>
+          <p:nvPr/>
+        </p:nvSpPr>
+        <p:spPr>
+          <a:xfrm>
+            <a:off x="640080" y="1234440"/>
+            <a:ext cx="10972800" cy="365760"/>
+          </a:xfrm>
+          <a:prstGeom prst="rect">
+            <a:avLst/>
+          </a:prstGeom>
+          <a:noFill/>
+        </p:spPr>
+        <p:txBody>
+          <a:bodyPr wrap="square" anchor="t" lIns="0" rIns="0" tIns="0" bIns="0">
+            <a:spAutoFit/>
+          </a:bodyPr>
+          <a:lstStyle/>
+          <a:p>
+            <a:pPr algn="l">
+              <a:spcBef>
+                <a:spcPts val="0"/>
+              </a:spcBef>
+              <a:spcAft>
+                <a:spcPts val="300"/>
+              </a:spcAft>
+            </a:pPr>
+            <a:r>
+              <a:rPr sz="1300" b="1">
+                <a:solidFill>
+                  <a:srgbClr val="0F244E"/>
+                </a:solidFill>
+                <a:latin typeface="微软雅黑"/>
+                <a:ea typeface="微软雅黑"/>
+              </a:rPr>
+              <a:t>『主流媒体权威引领 + 社交媒体精准触达』双轮驱动, 放大声量、赋能招商</a:t>
+            </a:r>
+          </a:p>
+        </p:txBody>
+      </p:sp>
+      <p:sp>
+        <p:nvSpPr>
+          <p:cNvPr id="10" name="Rectangle 9"/>
           <p:cNvSpPr/>
           <p:nvPr/>
         </p:nvSpPr>
         <p:spPr>
           <a:xfrm>
-            <a:off x="4937760" y="2706624"/>
-            <a:ext cx="146304" cy="146304"/>
-          </a:xfrm>
-          <a:prstGeom prst="ellipse">
+            <a:off x="640080" y="1783080"/>
+            <a:ext cx="5349240" cy="4023360"/>
+          </a:xfrm>
+          <a:prstGeom prst="rect">
+            <a:avLst/>
+          </a:prstGeom>
+          <a:solidFill>
+            <a:srgbClr val="FFFFFF"/>
+          </a:solidFill>
+          <a:ln w="9525">
+            <a:solidFill>
+              <a:srgbClr val="D8DFEA"/>
+            </a:solidFill>
+          </a:ln>
+          <a:effectLst/>
+        </p:spPr>
+        <p:style>
+          <a:lnRef idx="1">
+            <a:schemeClr val="accent1"/>
+          </a:lnRef>
+          <a:fillRef idx="3">
+            <a:schemeClr val="accent1"/>
+          </a:fillRef>
+          <a:effectRef idx="2">
+            <a:schemeClr val="accent1"/>
+          </a:effectRef>
+          <a:fontRef idx="minor">
+            <a:schemeClr val="lt1"/>
+          </a:fontRef>
+        </p:style>
+        <p:txBody>
+          <a:bodyPr rtlCol="0" anchor="ctr"/>
+          <a:lstStyle/>
+          <a:p>
+            <a:pPr algn="ctr"/>
+          </a:p>
+        </p:txBody>
+      </p:sp>
+      <p:sp>
+        <p:nvSpPr>
+          <p:cNvPr id="11" name="Rectangle 10"/>
+          <p:cNvSpPr/>
+          <p:nvPr/>
+        </p:nvSpPr>
+        <p:spPr>
+          <a:xfrm>
+            <a:off x="640080" y="1783080"/>
+            <a:ext cx="5349240" cy="502920"/>
+          </a:xfrm>
+          <a:prstGeom prst="rect">
+            <a:avLst/>
+          </a:prstGeom>
+          <a:solidFill>
+            <a:srgbClr val="0F244E"/>
+          </a:solidFill>
+          <a:ln>
+            <a:noFill/>
+          </a:ln>
+          <a:effectLst/>
+        </p:spPr>
+        <p:style>
+          <a:lnRef idx="1">
+            <a:schemeClr val="accent1"/>
+          </a:lnRef>
+          <a:fillRef idx="3">
+            <a:schemeClr val="accent1"/>
+          </a:fillRef>
+          <a:effectRef idx="2">
+            <a:schemeClr val="accent1"/>
+          </a:effectRef>
+          <a:fontRef idx="minor">
+            <a:schemeClr val="lt1"/>
+          </a:fontRef>
+        </p:style>
+        <p:txBody>
+          <a:bodyPr rtlCol="0" anchor="ctr"/>
+          <a:lstStyle/>
+          <a:p>
+            <a:pPr algn="ctr"/>
+          </a:p>
+        </p:txBody>
+      </p:sp>
+      <p:sp>
+        <p:nvSpPr>
+          <p:cNvPr id="12" name="TextBox 11"/>
+          <p:cNvSpPr txBox="1"/>
+          <p:nvPr/>
+        </p:nvSpPr>
+        <p:spPr>
+          <a:xfrm>
+            <a:off x="868680" y="1783080"/>
+            <a:ext cx="4937760" cy="502920"/>
+          </a:xfrm>
+          <a:prstGeom prst="rect">
+            <a:avLst/>
+          </a:prstGeom>
+          <a:noFill/>
+        </p:spPr>
+        <p:txBody>
+          <a:bodyPr wrap="square" anchor="ctr" lIns="0" rIns="0" tIns="0" bIns="0">
+            <a:spAutoFit/>
+          </a:bodyPr>
+          <a:lstStyle/>
+          <a:p>
+            <a:pPr algn="l">
+              <a:spcBef>
+                <a:spcPts val="0"/>
+              </a:spcBef>
+              <a:spcAft>
+                <a:spcPts val="300"/>
+              </a:spcAft>
+            </a:pPr>
+            <a:r>
+              <a:rPr sz="1300" b="1">
+                <a:solidFill>
+                  <a:srgbClr val="FFFFFF"/>
+                </a:solidFill>
+                <a:latin typeface="微软雅黑"/>
+                <a:ea typeface="微软雅黑"/>
+              </a:rPr>
+              <a:t>① 中央级 / 全国性 / 上海主流媒体</a:t>
+            </a:r>
+          </a:p>
+        </p:txBody>
+      </p:sp>
+      <p:sp>
+        <p:nvSpPr>
+          <p:cNvPr id="13" name="TextBox 12"/>
+          <p:cNvSpPr txBox="1"/>
+          <p:nvPr/>
+        </p:nvSpPr>
+        <p:spPr>
+          <a:xfrm>
+            <a:off x="868680" y="2468880"/>
+            <a:ext cx="4937760" cy="3200400"/>
+          </a:xfrm>
+          <a:prstGeom prst="rect">
+            <a:avLst/>
+          </a:prstGeom>
+          <a:noFill/>
+        </p:spPr>
+        <p:txBody>
+          <a:bodyPr wrap="square" lIns="0" tIns="0">
+            <a:spAutoFit/>
+          </a:bodyPr>
+          <a:lstStyle/>
+          <a:p>
+            <a:pPr>
+              <a:spcBef>
+                <a:spcPts val="0"/>
+              </a:spcBef>
+              <a:spcAft>
+                <a:spcPts val="1200"/>
+              </a:spcAft>
+            </a:pPr>
+            <a:r>
+              <a:rPr sz="1200" b="1">
+                <a:solidFill>
+                  <a:srgbClr val="F27E2D"/>
+                </a:solidFill>
+                <a:latin typeface="微软雅黑"/>
+                <a:ea typeface="微软雅黑"/>
+              </a:rPr>
+              <a:t>—  </a:t>
+            </a:r>
+            <a:r>
+              <a:rPr sz="1200" b="0">
+                <a:solidFill>
+                  <a:srgbClr val="212B42"/>
+                </a:solidFill>
+                <a:latin typeface="微软雅黑"/>
+                <a:ea typeface="微软雅黑"/>
+              </a:rPr>
+              <a:t>中央级:央视新闻、央广网、人民网、新华网、中新网、中国日报</a:t>
+            </a:r>
+          </a:p>
+          <a:p>
+            <a:pPr>
+              <a:spcBef>
+                <a:spcPts val="0"/>
+              </a:spcBef>
+              <a:spcAft>
+                <a:spcPts val="1200"/>
+              </a:spcAft>
+            </a:pPr>
+            <a:r>
+              <a:rPr sz="1200" b="1">
+                <a:solidFill>
+                  <a:srgbClr val="F27E2D"/>
+                </a:solidFill>
+                <a:latin typeface="微软雅黑"/>
+                <a:ea typeface="微软雅黑"/>
+              </a:rPr>
+              <a:t>—  </a:t>
+            </a:r>
+            <a:r>
+              <a:rPr sz="1200" b="0">
+                <a:solidFill>
+                  <a:srgbClr val="212B42"/>
+                </a:solidFill>
+                <a:latin typeface="微软雅黑"/>
+                <a:ea typeface="微软雅黑"/>
+              </a:rPr>
+              <a:t>全国财经政经:第一财经、21 世纪经济报道、澎湃、界面、上证报、中证报</a:t>
+            </a:r>
+          </a:p>
+          <a:p>
+            <a:pPr>
+              <a:spcBef>
+                <a:spcPts val="0"/>
+              </a:spcBef>
+              <a:spcAft>
+                <a:spcPts val="1200"/>
+              </a:spcAft>
+            </a:pPr>
+            <a:r>
+              <a:rPr sz="1200" b="1">
+                <a:solidFill>
+                  <a:srgbClr val="F27E2D"/>
+                </a:solidFill>
+                <a:latin typeface="微软雅黑"/>
+                <a:ea typeface="微软雅黑"/>
+              </a:rPr>
+              <a:t>—  </a:t>
+            </a:r>
+            <a:r>
+              <a:rPr sz="1200" b="0">
+                <a:solidFill>
+                  <a:srgbClr val="212B42"/>
+                </a:solidFill>
+                <a:latin typeface="微软雅黑"/>
+                <a:ea typeface="微软雅黑"/>
+              </a:rPr>
+              <a:t>上海区域:解放日报、文汇报、上观新闻、闵行区政府官网</a:t>
+            </a:r>
+          </a:p>
+          <a:p>
+            <a:pPr>
+              <a:spcBef>
+                <a:spcPts val="0"/>
+              </a:spcBef>
+              <a:spcAft>
+                <a:spcPts val="1200"/>
+              </a:spcAft>
+            </a:pPr>
+            <a:r>
+              <a:rPr sz="1200" b="1">
+                <a:solidFill>
+                  <a:srgbClr val="F27E2D"/>
+                </a:solidFill>
+                <a:latin typeface="微软雅黑"/>
+                <a:ea typeface="微软雅黑"/>
+              </a:rPr>
+              <a:t>—  </a:t>
+            </a:r>
+            <a:r>
+              <a:rPr sz="1200" b="0">
+                <a:solidFill>
+                  <a:srgbClr val="212B42"/>
+                </a:solidFill>
+                <a:latin typeface="微软雅黑"/>
+                <a:ea typeface="微软雅黑"/>
+              </a:rPr>
+              <a:t>作用:权威背书、定调舆情、提升招商公信力</a:t>
+            </a:r>
+          </a:p>
+        </p:txBody>
+      </p:sp>
+      <p:sp>
+        <p:nvSpPr>
+          <p:cNvPr id="14" name="Rectangle 13"/>
+          <p:cNvSpPr/>
+          <p:nvPr/>
+        </p:nvSpPr>
+        <p:spPr>
+          <a:xfrm>
+            <a:off x="6172200" y="1783080"/>
+            <a:ext cx="5394960" cy="4023360"/>
+          </a:xfrm>
+          <a:prstGeom prst="rect">
+            <a:avLst/>
+          </a:prstGeom>
+          <a:solidFill>
+            <a:srgbClr val="FFFFFF"/>
+          </a:solidFill>
+          <a:ln w="9525">
+            <a:solidFill>
+              <a:srgbClr val="D8DFEA"/>
+            </a:solidFill>
+          </a:ln>
+          <a:effectLst/>
+        </p:spPr>
+        <p:style>
+          <a:lnRef idx="1">
+            <a:schemeClr val="accent1"/>
+          </a:lnRef>
+          <a:fillRef idx="3">
+            <a:schemeClr val="accent1"/>
+          </a:fillRef>
+          <a:effectRef idx="2">
+            <a:schemeClr val="accent1"/>
+          </a:effectRef>
+          <a:fontRef idx="minor">
+            <a:schemeClr val="lt1"/>
+          </a:fontRef>
+        </p:style>
+        <p:txBody>
+          <a:bodyPr rtlCol="0" anchor="ctr"/>
+          <a:lstStyle/>
+          <a:p>
+            <a:pPr algn="ctr"/>
+          </a:p>
+        </p:txBody>
+      </p:sp>
+      <p:sp>
+        <p:nvSpPr>
+          <p:cNvPr id="15" name="Rectangle 14"/>
+          <p:cNvSpPr/>
+          <p:nvPr/>
+        </p:nvSpPr>
+        <p:spPr>
+          <a:xfrm>
+            <a:off x="6172200" y="1783080"/>
+            <a:ext cx="5394960" cy="502920"/>
+          </a:xfrm>
+          <a:prstGeom prst="rect">
             <a:avLst/>
           </a:prstGeom>
           <a:solidFill>
@@ -16533,14 +16900,200 @@
       </p:sp>
       <p:sp>
         <p:nvSpPr>
-          <p:cNvPr id="10" name="TextBox 9"/>
+          <p:cNvPr id="16" name="TextBox 15"/>
           <p:cNvSpPr txBox="1"/>
           <p:nvPr/>
         </p:nvSpPr>
         <p:spPr>
           <a:xfrm>
-            <a:off x="5303520" y="2596896"/>
-            <a:ext cx="6309360" cy="548640"/>
+            <a:off x="6400800" y="1783080"/>
+            <a:ext cx="4937760" cy="502920"/>
+          </a:xfrm>
+          <a:prstGeom prst="rect">
+            <a:avLst/>
+          </a:prstGeom>
+          <a:noFill/>
+        </p:spPr>
+        <p:txBody>
+          <a:bodyPr wrap="square" anchor="ctr" lIns="0" rIns="0" tIns="0" bIns="0">
+            <a:spAutoFit/>
+          </a:bodyPr>
+          <a:lstStyle/>
+          <a:p>
+            <a:pPr algn="l">
+              <a:spcBef>
+                <a:spcPts val="0"/>
+              </a:spcBef>
+              <a:spcAft>
+                <a:spcPts val="300"/>
+              </a:spcAft>
+            </a:pPr>
+            <a:r>
+              <a:rPr sz="1300" b="1">
+                <a:solidFill>
+                  <a:srgbClr val="FFFFFF"/>
+                </a:solidFill>
+                <a:latin typeface="微软雅黑"/>
+                <a:ea typeface="微软雅黑"/>
+              </a:rPr>
+              <a:t>② 社交媒体流量投放(双轮驱动)</a:t>
+            </a:r>
+          </a:p>
+        </p:txBody>
+      </p:sp>
+      <p:sp>
+        <p:nvSpPr>
+          <p:cNvPr id="17" name="TextBox 16"/>
+          <p:cNvSpPr txBox="1"/>
+          <p:nvPr/>
+        </p:nvSpPr>
+        <p:spPr>
+          <a:xfrm>
+            <a:off x="6400800" y="2468880"/>
+            <a:ext cx="5029200" cy="3200400"/>
+          </a:xfrm>
+          <a:prstGeom prst="rect">
+            <a:avLst/>
+          </a:prstGeom>
+          <a:noFill/>
+        </p:spPr>
+        <p:txBody>
+          <a:bodyPr wrap="square" lIns="0" tIns="0">
+            <a:spAutoFit/>
+          </a:bodyPr>
+          <a:lstStyle/>
+          <a:p>
+            <a:pPr>
+              <a:spcBef>
+                <a:spcPts val="0"/>
+              </a:spcBef>
+              <a:spcAft>
+                <a:spcPts val="1200"/>
+              </a:spcAft>
+            </a:pPr>
+            <a:r>
+              <a:rPr sz="1200" b="1">
+                <a:solidFill>
+                  <a:srgbClr val="F27E2D"/>
+                </a:solidFill>
+                <a:latin typeface="微软雅黑"/>
+                <a:ea typeface="微软雅黑"/>
+              </a:rPr>
+              <a:t>—  </a:t>
+            </a:r>
+            <a:r>
+              <a:rPr sz="1200" b="0">
+                <a:solidFill>
+                  <a:srgbClr val="212B42"/>
+                </a:solidFill>
+                <a:latin typeface="微软雅黑"/>
+                <a:ea typeface="微软雅黑"/>
+              </a:rPr>
+              <a:t>抖音:高频互动 + 信息流广告, 精准算法推荐</a:t>
+            </a:r>
+          </a:p>
+          <a:p>
+            <a:pPr>
+              <a:spcBef>
+                <a:spcPts val="0"/>
+              </a:spcBef>
+              <a:spcAft>
+                <a:spcPts val="1200"/>
+              </a:spcAft>
+            </a:pPr>
+            <a:r>
+              <a:rPr sz="1200" b="1">
+                <a:solidFill>
+                  <a:srgbClr val="F27E2D"/>
+                </a:solidFill>
+                <a:latin typeface="微软雅黑"/>
+                <a:ea typeface="微软雅黑"/>
+              </a:rPr>
+              <a:t>—  </a:t>
+            </a:r>
+            <a:r>
+              <a:rPr sz="1200" b="0">
+                <a:solidFill>
+                  <a:srgbClr val="212B42"/>
+                </a:solidFill>
+                <a:latin typeface="微软雅黑"/>
+                <a:ea typeface="微软雅黑"/>
+              </a:rPr>
+              <a:t>今日头条:深度阅读场景, 广度覆盖</a:t>
+            </a:r>
+          </a:p>
+          <a:p>
+            <a:pPr>
+              <a:spcBef>
+                <a:spcPts val="0"/>
+              </a:spcBef>
+              <a:spcAft>
+                <a:spcPts val="1200"/>
+              </a:spcAft>
+            </a:pPr>
+            <a:r>
+              <a:rPr sz="1200" b="1">
+                <a:solidFill>
+                  <a:srgbClr val="F27E2D"/>
+                </a:solidFill>
+                <a:latin typeface="微软雅黑"/>
+                <a:ea typeface="微软雅黑"/>
+              </a:rPr>
+              <a:t>—  </a:t>
+            </a:r>
+            <a:r>
+              <a:rPr sz="1200" b="0">
+                <a:solidFill>
+                  <a:srgbClr val="212B42"/>
+                </a:solidFill>
+                <a:latin typeface="微软雅黑"/>
+                <a:ea typeface="微软雅黑"/>
+              </a:rPr>
+              <a:t>投放区域:上海;精准锁定目标受众</a:t>
+            </a:r>
+          </a:p>
+          <a:p>
+            <a:pPr>
+              <a:spcBef>
+                <a:spcPts val="0"/>
+              </a:spcBef>
+              <a:spcAft>
+                <a:spcPts val="1200"/>
+              </a:spcAft>
+            </a:pPr>
+            <a:r>
+              <a:rPr sz="1200" b="1">
+                <a:solidFill>
+                  <a:srgbClr val="F27E2D"/>
+                </a:solidFill>
+                <a:latin typeface="微软雅黑"/>
+                <a:ea typeface="微软雅黑"/>
+              </a:rPr>
+              <a:t>—  </a:t>
+            </a:r>
+            <a:r>
+              <a:rPr sz="1200" b="0">
+                <a:solidFill>
+                  <a:srgbClr val="212B42"/>
+                </a:solidFill>
+                <a:latin typeface="微软雅黑"/>
+                <a:ea typeface="微软雅黑"/>
+              </a:rPr>
+              <a:t>为招商转化奠定流量基础与认知铺垫</a:t>
+            </a:r>
+          </a:p>
+        </p:txBody>
+      </p:sp>
+      <p:sp>
+        <p:nvSpPr>
+          <p:cNvPr id="18" name="TextBox 17"/>
+          <p:cNvSpPr txBox="1"/>
+          <p:nvPr/>
+        </p:nvSpPr>
+        <p:spPr>
+          <a:xfrm>
+            <a:off x="640080" y="5989320"/>
+            <a:ext cx="10972800" cy="457200"/>
           </a:xfrm>
           <a:prstGeom prst="rect">
             <a:avLst/>
@@ -16562,34 +17115,34 @@
               </a:spcAft>
             </a:pPr>
             <a:r>
-              <a:rPr sz="1400" b="0">
-                <a:solidFill>
-                  <a:srgbClr val="E5EBF5"/>
-                </a:solidFill>
-                <a:latin typeface="微软雅黑"/>
-                <a:ea typeface="微软雅黑"/>
-              </a:rPr>
-              <a:t>招商佣金:实际成交年租金的 1.5-2 个月</a:t>
-            </a:r>
-          </a:p>
-        </p:txBody>
-      </p:sp>
-      <p:sp>
-        <p:nvSpPr>
-          <p:cNvPr id="11" name="Oval 10"/>
+              <a:rPr sz="1100" b="1">
+                <a:solidFill>
+                  <a:srgbClr val="F27E2D"/>
+                </a:solidFill>
+                <a:latin typeface="微软雅黑"/>
+                <a:ea typeface="微软雅黑"/>
+              </a:rPr>
+              <a:t>重大节点(9/30 签约、5/1 开业)前集中投放, 把品牌声量直接转化为招商线索;合作结束提供完整投放报告(链接+曝光+分析)</a:t>
+            </a:r>
+          </a:p>
+        </p:txBody>
+      </p:sp>
+      <p:sp>
+        <p:nvSpPr>
+          <p:cNvPr id="19" name="Rectangle 18"/>
           <p:cNvSpPr/>
           <p:nvPr/>
         </p:nvSpPr>
         <p:spPr>
           <a:xfrm>
-            <a:off x="4937760" y="3383280"/>
-            <a:ext cx="146304" cy="146304"/>
-          </a:xfrm>
-          <a:prstGeom prst="ellipse">
+            <a:off x="0" y="6656832"/>
+            <a:ext cx="12191695" cy="201168"/>
+          </a:xfrm>
+          <a:prstGeom prst="rect">
             <a:avLst/>
           </a:prstGeom>
           <a:solidFill>
-            <a:srgbClr val="F27E2D"/>
+            <a:srgbClr val="0F244E"/>
           </a:solidFill>
           <a:ln>
             <a:noFill/>
@@ -16620,14 +17173,14 @@
       </p:sp>
       <p:sp>
         <p:nvSpPr>
-          <p:cNvPr id="12" name="TextBox 11"/>
+          <p:cNvPr id="20" name="TextBox 19"/>
           <p:cNvSpPr txBox="1"/>
           <p:nvPr/>
         </p:nvSpPr>
         <p:spPr>
           <a:xfrm>
-            <a:off x="5303520" y="3273552"/>
-            <a:ext cx="6309360" cy="548640"/>
+            <a:off x="502920" y="6656832"/>
+            <a:ext cx="9144000" cy="201168"/>
           </a:xfrm>
           <a:prstGeom prst="rect">
             <a:avLst/>
@@ -16635,7 +17188,7 @@
           <a:noFill/>
         </p:spPr>
         <p:txBody>
-          <a:bodyPr wrap="square" anchor="t" lIns="0" rIns="0" tIns="0" bIns="0">
+          <a:bodyPr wrap="square" anchor="ctr" lIns="0" rIns="0" tIns="0" bIns="0">
             <a:spAutoFit/>
           </a:bodyPr>
           <a:lstStyle/>
@@ -16649,72 +17202,28 @@
               </a:spcAft>
             </a:pPr>
             <a:r>
-              <a:rPr sz="1400" b="0">
-                <a:solidFill>
-                  <a:srgbClr val="E5EBF5"/>
-                </a:solidFill>
-                <a:latin typeface="微软雅黑"/>
-                <a:ea typeface="微软雅黑"/>
-              </a:rPr>
-              <a:t>沙龙费一次性付清, 挂牌 10 万/项可选</a:t>
-            </a:r>
-          </a:p>
-        </p:txBody>
-      </p:sp>
-      <p:sp>
-        <p:nvSpPr>
-          <p:cNvPr id="13" name="Oval 12"/>
-          <p:cNvSpPr/>
-          <p:nvPr/>
-        </p:nvSpPr>
-        <p:spPr>
-          <a:xfrm>
-            <a:off x="4937760" y="4059936"/>
-            <a:ext cx="146304" cy="146304"/>
-          </a:xfrm>
-          <a:prstGeom prst="ellipse">
-            <a:avLst/>
-          </a:prstGeom>
-          <a:solidFill>
-            <a:srgbClr val="F27E2D"/>
-          </a:solidFill>
-          <a:ln>
-            <a:noFill/>
-          </a:ln>
-          <a:effectLst/>
-        </p:spPr>
-        <p:style>
-          <a:lnRef idx="1">
-            <a:schemeClr val="accent1"/>
-          </a:lnRef>
-          <a:fillRef idx="3">
-            <a:schemeClr val="accent1"/>
-          </a:fillRef>
-          <a:effectRef idx="2">
-            <a:schemeClr val="accent1"/>
-          </a:effectRef>
-          <a:fontRef idx="minor">
-            <a:schemeClr val="lt1"/>
-          </a:fontRef>
-        </p:style>
-        <p:txBody>
-          <a:bodyPr rtlCol="0" anchor="ctr"/>
-          <a:lstStyle/>
-          <a:p>
-            <a:pPr algn="ctr"/>
-          </a:p>
-        </p:txBody>
-      </p:sp>
-      <p:sp>
-        <p:nvSpPr>
-          <p:cNvPr id="14" name="TextBox 13"/>
+              <a:rPr sz="800" b="0">
+                <a:solidFill>
+                  <a:srgbClr val="C6D0E2"/>
+                </a:solidFill>
+                <a:latin typeface="微软雅黑"/>
+                <a:ea typeface="微软雅黑"/>
+              </a:rPr>
+              <a:t>元谷项目 2 万方招商策略汇报 · 危建平总汇报版 (脱敏)</a:t>
+            </a:r>
+          </a:p>
+        </p:txBody>
+      </p:sp>
+      <p:sp>
+        <p:nvSpPr>
+          <p:cNvPr id="21" name="TextBox 20"/>
           <p:cNvSpPr txBox="1"/>
           <p:nvPr/>
         </p:nvSpPr>
         <p:spPr>
           <a:xfrm>
-            <a:off x="5303520" y="3950208"/>
-            <a:ext cx="6309360" cy="548640"/>
+            <a:off x="10789920" y="6656832"/>
+            <a:ext cx="914400" cy="201168"/>
           </a:xfrm>
           <a:prstGeom prst="rect">
             <a:avLst/>
@@ -16722,12 +17231,12 @@
           <a:noFill/>
         </p:spPr>
         <p:txBody>
-          <a:bodyPr wrap="square" anchor="t" lIns="0" rIns="0" tIns="0" bIns="0">
+          <a:bodyPr wrap="square" anchor="ctr" lIns="0" rIns="0" tIns="0" bIns="0">
             <a:spAutoFit/>
           </a:bodyPr>
           <a:lstStyle/>
           <a:p>
-            <a:pPr algn="l">
+            <a:pPr algn="r">
               <a:spcBef>
                 <a:spcPts val="0"/>
               </a:spcBef>
@@ -16736,14 +17245,14 @@
               </a:spcAft>
             </a:pPr>
             <a:r>
-              <a:rPr sz="1400" b="0">
-                <a:solidFill>
-                  <a:srgbClr val="E5EBF5"/>
-                </a:solidFill>
-                <a:latin typeface="微软雅黑"/>
-                <a:ea typeface="微软雅黑"/>
-              </a:rPr>
-              <a:t>对项目方:满租年租金 + 资产增值</a:t>
+              <a:rPr sz="800" b="1">
+                <a:solidFill>
+                  <a:srgbClr val="E8C87A"/>
+                </a:solidFill>
+                <a:latin typeface="微软雅黑"/>
+                <a:ea typeface="微软雅黑"/>
+              </a:rPr>
+              <a:t>13</a:t>
             </a:r>
           </a:p>
         </p:txBody>
@@ -18767,7 +19276,7 @@
                 <a:latin typeface="微软雅黑"/>
                 <a:ea typeface="微软雅黑"/>
               </a:rPr>
-              <a:t>06 · 服务费用与价值</a:t>
+              <a:t>05 · 品牌与活动</a:t>
             </a:r>
           </a:p>
         </p:txBody>
@@ -18810,7 +19319,7 @@
                 <a:latin typeface="微软雅黑"/>
                 <a:ea typeface="微软雅黑"/>
               </a:rPr>
-              <a:t>服务费用构成(已取消月费 · 不签对赌)</a:t>
+              <a:t>媒体宣传服务内容与报价(可选模块)</a:t>
             </a:r>
           </a:p>
         </p:txBody>
@@ -18887,8 +19396,1580 @@
           <p:nvPr/>
         </p:nvGraphicFramePr>
         <p:xfrm>
+          <a:off x="640080" y="1417320"/>
+          <a:ext cx="10927079" cy="2944368"/>
+        </p:xfrm>
+        <a:graphic>
+          <a:graphicData uri="http://schemas.openxmlformats.org/drawingml/2006/table">
+            <a:tbl>
+              <a:tblPr>
+                <a:tableStyleId>{5C22544A-7EE6-4342-B048-85BDC9FD1C3A}</a:tableStyleId>
+              </a:tblPr>
+              <a:tblGrid>
+                <a:gridCol w="5120640"/>
+                <a:gridCol w="1828800"/>
+                <a:gridCol w="3977639"/>
+              </a:tblGrid>
+              <a:tr h="384048">
+                <a:tc>
+                  <a:txBody>
+                    <a:bodyPr/>
+                    <a:lstStyle/>
+                    <a:p>
+                      <a:r>
+                        <a:rPr sz="1100" b="1">
+                          <a:solidFill>
+                            <a:srgbClr val="FFFFFF"/>
+                          </a:solidFill>
+                          <a:latin typeface="微软雅黑"/>
+                          <a:ea typeface="微软雅黑"/>
+                        </a:rPr>
+                        <a:t>服务项目</a:t>
+                      </a:r>
+                    </a:p>
+                  </a:txBody>
+                  <a:tcPr marL="91440" marR="54864" marT="18288" marB="18288" anchor="ctr">
+                    <a:solidFill>
+                      <a:srgbClr val="0F244E"/>
+                    </a:solidFill>
+                  </a:tcPr>
+                </a:tc>
+                <a:tc>
+                  <a:txBody>
+                    <a:bodyPr/>
+                    <a:lstStyle/>
+                    <a:p>
+                      <a:r>
+                        <a:rPr sz="1100" b="1">
+                          <a:solidFill>
+                            <a:srgbClr val="FFFFFF"/>
+                          </a:solidFill>
+                          <a:latin typeface="微软雅黑"/>
+                          <a:ea typeface="微软雅黑"/>
+                        </a:rPr>
+                        <a:t>数量</a:t>
+                      </a:r>
+                    </a:p>
+                  </a:txBody>
+                  <a:tcPr marL="91440" marR="54864" marT="18288" marB="18288" anchor="ctr">
+                    <a:solidFill>
+                      <a:srgbClr val="0F244E"/>
+                    </a:solidFill>
+                  </a:tcPr>
+                </a:tc>
+                <a:tc>
+                  <a:txBody>
+                    <a:bodyPr/>
+                    <a:lstStyle/>
+                    <a:p>
+                      <a:r>
+                        <a:rPr sz="1100" b="1">
+                          <a:solidFill>
+                            <a:srgbClr val="FFFFFF"/>
+                          </a:solidFill>
+                          <a:latin typeface="微软雅黑"/>
+                          <a:ea typeface="微软雅黑"/>
+                        </a:rPr>
+                        <a:t>费用 / 说明</a:t>
+                      </a:r>
+                    </a:p>
+                  </a:txBody>
+                  <a:tcPr marL="91440" marR="54864" marT="18288" marB="18288" anchor="ctr">
+                    <a:solidFill>
+                      <a:srgbClr val="0F244E"/>
+                    </a:solidFill>
+                  </a:tcPr>
+                </a:tc>
+              </a:tr>
+              <a:tr h="640080">
+                <a:tc>
+                  <a:txBody>
+                    <a:bodyPr/>
+                    <a:lstStyle/>
+                    <a:p>
+                      <a:r>
+                        <a:rPr sz="1050" b="1">
+                          <a:solidFill>
+                            <a:srgbClr val="0F244E"/>
+                          </a:solidFill>
+                          <a:latin typeface="微软雅黑"/>
+                          <a:ea typeface="微软雅黑"/>
+                        </a:rPr>
+                        <a:t>原创内容生产(品牌+营销稿原创采写)</a:t>
+                      </a:r>
+                    </a:p>
+                  </a:txBody>
+                  <a:tcPr marL="91440" marR="54864" marT="9144" marB="9144" anchor="ctr">
+                    <a:solidFill>
+                      <a:srgbClr val="FFFFFF"/>
+                    </a:solidFill>
+                  </a:tcPr>
+                </a:tc>
+                <a:tc>
+                  <a:txBody>
+                    <a:bodyPr/>
+                    <a:lstStyle/>
+                    <a:p>
+                      <a:r>
+                        <a:rPr sz="1050" b="0">
+                          <a:solidFill>
+                            <a:srgbClr val="212B42"/>
+                          </a:solidFill>
+                          <a:latin typeface="微软雅黑"/>
+                          <a:ea typeface="微软雅黑"/>
+                        </a:rPr>
+                        <a:t>3 篇</a:t>
+                      </a:r>
+                    </a:p>
+                  </a:txBody>
+                  <a:tcPr marL="91440" marR="54864" marT="9144" marB="9144" anchor="ctr">
+                    <a:solidFill>
+                      <a:srgbClr val="FFFFFF"/>
+                    </a:solidFill>
+                  </a:tcPr>
+                </a:tc>
+                <a:tc>
+                  <a:txBody>
+                    <a:bodyPr/>
+                    <a:lstStyle/>
+                    <a:p>
+                      <a:r>
+                        <a:rPr sz="1050" b="0">
+                          <a:solidFill>
+                            <a:srgbClr val="212B42"/>
+                          </a:solidFill>
+                          <a:latin typeface="微软雅黑"/>
+                          <a:ea typeface="微软雅黑"/>
+                        </a:rPr>
+                        <a:t>折后 5 万元(媒体总曝光量预计 ≥ 150 万)</a:t>
+                      </a:r>
+                    </a:p>
+                  </a:txBody>
+                  <a:tcPr marL="91440" marR="54864" marT="9144" marB="9144" anchor="ctr">
+                    <a:solidFill>
+                      <a:srgbClr val="FFFFFF"/>
+                    </a:solidFill>
+                  </a:tcPr>
+                </a:tc>
+              </a:tr>
+              <a:tr h="640080">
+                <a:tc>
+                  <a:txBody>
+                    <a:bodyPr/>
+                    <a:lstStyle/>
+                    <a:p>
+                      <a:r>
+                        <a:rPr sz="1050" b="1">
+                          <a:solidFill>
+                            <a:srgbClr val="0F244E"/>
+                          </a:solidFill>
+                          <a:latin typeface="微软雅黑"/>
+                          <a:ea typeface="微软雅黑"/>
+                        </a:rPr>
+                        <a:t>中央级/全国/上海主流媒体宣发</a:t>
+                      </a:r>
+                    </a:p>
+                  </a:txBody>
+                  <a:tcPr marL="91440" marR="54864" marT="9144" marB="9144" anchor="ctr">
+                    <a:solidFill>
+                      <a:srgbClr val="EDF1F8"/>
+                    </a:solidFill>
+                  </a:tcPr>
+                </a:tc>
+                <a:tc>
+                  <a:txBody>
+                    <a:bodyPr/>
+                    <a:lstStyle/>
+                    <a:p>
+                      <a:r>
+                        <a:rPr sz="1050" b="0">
+                          <a:solidFill>
+                            <a:srgbClr val="212B42"/>
+                          </a:solidFill>
+                          <a:latin typeface="微软雅黑"/>
+                          <a:ea typeface="微软雅黑"/>
+                        </a:rPr>
+                        <a:t>10 篇</a:t>
+                      </a:r>
+                    </a:p>
+                  </a:txBody>
+                  <a:tcPr marL="91440" marR="54864" marT="9144" marB="9144" anchor="ctr">
+                    <a:solidFill>
+                      <a:srgbClr val="EDF1F8"/>
+                    </a:solidFill>
+                  </a:tcPr>
+                </a:tc>
+                <a:tc>
+                  <a:txBody>
+                    <a:bodyPr/>
+                    <a:lstStyle/>
+                    <a:p>
+                      <a:r>
+                        <a:rPr sz="1050" b="0">
+                          <a:solidFill>
+                            <a:srgbClr val="212B42"/>
+                          </a:solidFill>
+                          <a:latin typeface="微软雅黑"/>
+                          <a:ea typeface="微软雅黑"/>
+                        </a:rPr>
+                        <a:t>打包报价(按媒体档位据实核算)</a:t>
+                      </a:r>
+                    </a:p>
+                  </a:txBody>
+                  <a:tcPr marL="91440" marR="54864" marT="9144" marB="9144" anchor="ctr">
+                    <a:solidFill>
+                      <a:srgbClr val="EDF1F8"/>
+                    </a:solidFill>
+                  </a:tcPr>
+                </a:tc>
+              </a:tr>
+              <a:tr h="640080">
+                <a:tc>
+                  <a:txBody>
+                    <a:bodyPr/>
+                    <a:lstStyle/>
+                    <a:p>
+                      <a:r>
+                        <a:rPr sz="1050" b="1">
+                          <a:solidFill>
+                            <a:srgbClr val="0F244E"/>
+                          </a:solidFill>
+                          <a:latin typeface="微软雅黑"/>
+                          <a:ea typeface="微软雅黑"/>
+                        </a:rPr>
+                        <a:t>社交媒体流量投放(抖音/今日头条信息流, 上海)</a:t>
+                      </a:r>
+                    </a:p>
+                  </a:txBody>
+                  <a:tcPr marL="91440" marR="54864" marT="9144" marB="9144" anchor="ctr">
+                    <a:solidFill>
+                      <a:srgbClr val="FFFFFF"/>
+                    </a:solidFill>
+                  </a:tcPr>
+                </a:tc>
+                <a:tc>
+                  <a:txBody>
+                    <a:bodyPr/>
+                    <a:lstStyle/>
+                    <a:p>
+                      <a:r>
+                        <a:rPr sz="1050" b="0">
+                          <a:solidFill>
+                            <a:srgbClr val="212B42"/>
+                          </a:solidFill>
+                          <a:latin typeface="微软雅黑"/>
+                          <a:ea typeface="微软雅黑"/>
+                        </a:rPr>
+                        <a:t>按投放量</a:t>
+                      </a:r>
+                    </a:p>
+                  </a:txBody>
+                  <a:tcPr marL="91440" marR="54864" marT="9144" marB="9144" anchor="ctr">
+                    <a:solidFill>
+                      <a:srgbClr val="FFFFFF"/>
+                    </a:solidFill>
+                  </a:tcPr>
+                </a:tc>
+                <a:tc>
+                  <a:txBody>
+                    <a:bodyPr/>
+                    <a:lstStyle/>
+                    <a:p>
+                      <a:r>
+                        <a:rPr sz="1050" b="0">
+                          <a:solidFill>
+                            <a:srgbClr val="212B42"/>
+                          </a:solidFill>
+                          <a:latin typeface="微软雅黑"/>
+                          <a:ea typeface="微软雅黑"/>
+                        </a:rPr>
+                        <a:t>按投放量计(短视频拍摄制作费不含)</a:t>
+                      </a:r>
+                    </a:p>
+                  </a:txBody>
+                  <a:tcPr marL="91440" marR="54864" marT="9144" marB="9144" anchor="ctr">
+                    <a:solidFill>
+                      <a:srgbClr val="FFFFFF"/>
+                    </a:solidFill>
+                  </a:tcPr>
+                </a:tc>
+              </a:tr>
+              <a:tr h="640080">
+                <a:tc>
+                  <a:txBody>
+                    <a:bodyPr/>
+                    <a:lstStyle/>
+                    <a:p>
+                      <a:r>
+                        <a:rPr sz="1050" b="1">
+                          <a:solidFill>
+                            <a:srgbClr val="0F244E"/>
+                          </a:solidFill>
+                          <a:latin typeface="微软雅黑"/>
+                          <a:ea typeface="微软雅黑"/>
+                        </a:rPr>
+                        <a:t>营销策划与舆情管理咨询</a:t>
+                      </a:r>
+                    </a:p>
+                  </a:txBody>
+                  <a:tcPr marL="91440" marR="54864" marT="9144" marB="9144" anchor="ctr">
+                    <a:solidFill>
+                      <a:srgbClr val="EDF1F8"/>
+                    </a:solidFill>
+                  </a:tcPr>
+                </a:tc>
+                <a:tc>
+                  <a:txBody>
+                    <a:bodyPr/>
+                    <a:lstStyle/>
+                    <a:p>
+                      <a:r>
+                        <a:rPr sz="1050" b="0">
+                          <a:solidFill>
+                            <a:srgbClr val="212B42"/>
+                          </a:solidFill>
+                          <a:latin typeface="微软雅黑"/>
+                          <a:ea typeface="微软雅黑"/>
+                        </a:rPr>
+                        <a:t>不超 2 次</a:t>
+                      </a:r>
+                    </a:p>
+                  </a:txBody>
+                  <a:tcPr marL="91440" marR="54864" marT="9144" marB="9144" anchor="ctr">
+                    <a:solidFill>
+                      <a:srgbClr val="EDF1F8"/>
+                    </a:solidFill>
+                  </a:tcPr>
+                </a:tc>
+                <a:tc>
+                  <a:txBody>
+                    <a:bodyPr/>
+                    <a:lstStyle/>
+                    <a:p>
+                      <a:r>
+                        <a:rPr sz="1050" b="0">
+                          <a:solidFill>
+                            <a:srgbClr val="212B42"/>
+                          </a:solidFill>
+                          <a:latin typeface="微软雅黑"/>
+                          <a:ea typeface="微软雅黑"/>
+                        </a:rPr>
+                        <a:t>含于媒体服务包</a:t>
+                      </a:r>
+                    </a:p>
+                  </a:txBody>
+                  <a:tcPr marL="91440" marR="54864" marT="9144" marB="9144" anchor="ctr">
+                    <a:solidFill>
+                      <a:srgbClr val="EDF1F8"/>
+                    </a:solidFill>
+                  </a:tcPr>
+                </a:tc>
+              </a:tr>
+            </a:tbl>
+          </a:graphicData>
+        </a:graphic>
+      </p:graphicFrame>
+      <p:sp>
+        <p:nvSpPr>
+          <p:cNvPr id="10" name="TextBox 9"/>
+          <p:cNvSpPr txBox="1"/>
+          <p:nvPr/>
+        </p:nvSpPr>
+        <p:spPr>
+          <a:xfrm>
+            <a:off x="640080" y="4572000"/>
+            <a:ext cx="10972800" cy="1371600"/>
+          </a:xfrm>
+          <a:prstGeom prst="rect">
+            <a:avLst/>
+          </a:prstGeom>
+          <a:noFill/>
+        </p:spPr>
+        <p:txBody>
+          <a:bodyPr wrap="square" lIns="0" tIns="0">
+            <a:spAutoFit/>
+          </a:bodyPr>
+          <a:lstStyle/>
+          <a:p>
+            <a:pPr>
+              <a:spcBef>
+                <a:spcPts val="0"/>
+              </a:spcBef>
+              <a:spcAft>
+                <a:spcPts val="800"/>
+              </a:spcAft>
+            </a:pPr>
+            <a:r>
+              <a:rPr sz="1250" b="1">
+                <a:solidFill>
+                  <a:srgbClr val="F27E2D"/>
+                </a:solidFill>
+                <a:latin typeface="微软雅黑"/>
+                <a:ea typeface="微软雅黑"/>
+              </a:rPr>
+              <a:t>—  </a:t>
+            </a:r>
+            <a:r>
+              <a:rPr sz="1250" b="0">
+                <a:solidFill>
+                  <a:srgbClr val="212B42"/>
+                </a:solidFill>
+                <a:latin typeface="微软雅黑"/>
+                <a:ea typeface="微软雅黑"/>
+              </a:rPr>
+              <a:t>服务周期:自签订起至 2026/12/31, 乙方享优先续约权;</a:t>
+            </a:r>
+          </a:p>
+          <a:p>
+            <a:pPr>
+              <a:spcBef>
+                <a:spcPts val="0"/>
+              </a:spcBef>
+              <a:spcAft>
+                <a:spcPts val="800"/>
+              </a:spcAft>
+            </a:pPr>
+            <a:r>
+              <a:rPr sz="1250" b="1">
+                <a:solidFill>
+                  <a:srgbClr val="F27E2D"/>
+                </a:solidFill>
+                <a:latin typeface="微软雅黑"/>
+                <a:ea typeface="微软雅黑"/>
+              </a:rPr>
+              <a:t>—  </a:t>
+            </a:r>
+            <a:r>
+              <a:rPr sz="1250" b="0">
+                <a:solidFill>
+                  <a:srgbClr val="212B42"/>
+                </a:solidFill>
+                <a:latin typeface="微软雅黑"/>
+                <a:ea typeface="微软雅黑"/>
+              </a:rPr>
+              <a:t>该媒体宣传为可选模块, 与招商佣金、沙龙、挂牌相互独立、不影响其他计费;</a:t>
+            </a:r>
+          </a:p>
+          <a:p>
+            <a:pPr>
+              <a:spcBef>
+                <a:spcPts val="0"/>
+              </a:spcBef>
+              <a:spcAft>
+                <a:spcPts val="800"/>
+              </a:spcAft>
+            </a:pPr>
+            <a:r>
+              <a:rPr sz="1250" b="1">
+                <a:solidFill>
+                  <a:srgbClr val="F27E2D"/>
+                </a:solidFill>
+                <a:latin typeface="微软雅黑"/>
+                <a:ea typeface="微软雅黑"/>
+              </a:rPr>
+              <a:t>—  </a:t>
+            </a:r>
+            <a:r>
+              <a:rPr sz="1250" b="0">
+                <a:solidFill>
+                  <a:srgbClr val="212B42"/>
+                </a:solidFill>
+                <a:latin typeface="微软雅黑"/>
+                <a:ea typeface="微软雅黑"/>
+              </a:rPr>
+              <a:t>联动 6 场沙龙 + 5·22 峰会 + 5 项挂牌 + 福布斯, 形成『活动造势 + 媒体放大』闭环。</a:t>
+            </a:r>
+          </a:p>
+        </p:txBody>
+      </p:sp>
+      <p:sp>
+        <p:nvSpPr>
+          <p:cNvPr id="11" name="Rectangle 10"/>
+          <p:cNvSpPr/>
+          <p:nvPr/>
+        </p:nvSpPr>
+        <p:spPr>
+          <a:xfrm>
+            <a:off x="0" y="6656832"/>
+            <a:ext cx="12191695" cy="201168"/>
+          </a:xfrm>
+          <a:prstGeom prst="rect">
+            <a:avLst/>
+          </a:prstGeom>
+          <a:solidFill>
+            <a:srgbClr val="0F244E"/>
+          </a:solidFill>
+          <a:ln>
+            <a:noFill/>
+          </a:ln>
+          <a:effectLst/>
+        </p:spPr>
+        <p:style>
+          <a:lnRef idx="1">
+            <a:schemeClr val="accent1"/>
+          </a:lnRef>
+          <a:fillRef idx="3">
+            <a:schemeClr val="accent1"/>
+          </a:fillRef>
+          <a:effectRef idx="2">
+            <a:schemeClr val="accent1"/>
+          </a:effectRef>
+          <a:fontRef idx="minor">
+            <a:schemeClr val="lt1"/>
+          </a:fontRef>
+        </p:style>
+        <p:txBody>
+          <a:bodyPr rtlCol="0" anchor="ctr"/>
+          <a:lstStyle/>
+          <a:p>
+            <a:pPr algn="ctr"/>
+          </a:p>
+        </p:txBody>
+      </p:sp>
+      <p:sp>
+        <p:nvSpPr>
+          <p:cNvPr id="12" name="TextBox 11"/>
+          <p:cNvSpPr txBox="1"/>
+          <p:nvPr/>
+        </p:nvSpPr>
+        <p:spPr>
+          <a:xfrm>
+            <a:off x="502920" y="6656832"/>
+            <a:ext cx="9144000" cy="201168"/>
+          </a:xfrm>
+          <a:prstGeom prst="rect">
+            <a:avLst/>
+          </a:prstGeom>
+          <a:noFill/>
+        </p:spPr>
+        <p:txBody>
+          <a:bodyPr wrap="square" anchor="ctr" lIns="0" rIns="0" tIns="0" bIns="0">
+            <a:spAutoFit/>
+          </a:bodyPr>
+          <a:lstStyle/>
+          <a:p>
+            <a:pPr algn="l">
+              <a:spcBef>
+                <a:spcPts val="0"/>
+              </a:spcBef>
+              <a:spcAft>
+                <a:spcPts val="300"/>
+              </a:spcAft>
+            </a:pPr>
+            <a:r>
+              <a:rPr sz="800" b="0">
+                <a:solidFill>
+                  <a:srgbClr val="C6D0E2"/>
+                </a:solidFill>
+                <a:latin typeface="微软雅黑"/>
+                <a:ea typeface="微软雅黑"/>
+              </a:rPr>
+              <a:t>元谷项目 2 万方招商策略汇报 · 危建平总汇报版 (脱敏)</a:t>
+            </a:r>
+          </a:p>
+        </p:txBody>
+      </p:sp>
+      <p:sp>
+        <p:nvSpPr>
+          <p:cNvPr id="13" name="TextBox 12"/>
+          <p:cNvSpPr txBox="1"/>
+          <p:nvPr/>
+        </p:nvSpPr>
+        <p:spPr>
+          <a:xfrm>
+            <a:off x="10789920" y="6656832"/>
+            <a:ext cx="914400" cy="201168"/>
+          </a:xfrm>
+          <a:prstGeom prst="rect">
+            <a:avLst/>
+          </a:prstGeom>
+          <a:noFill/>
+        </p:spPr>
+        <p:txBody>
+          <a:bodyPr wrap="square" anchor="ctr" lIns="0" rIns="0" tIns="0" bIns="0">
+            <a:spAutoFit/>
+          </a:bodyPr>
+          <a:lstStyle/>
+          <a:p>
+            <a:pPr algn="r">
+              <a:spcBef>
+                <a:spcPts val="0"/>
+              </a:spcBef>
+              <a:spcAft>
+                <a:spcPts val="300"/>
+              </a:spcAft>
+            </a:pPr>
+            <a:r>
+              <a:rPr sz="800" b="1">
+                <a:solidFill>
+                  <a:srgbClr val="E8C87A"/>
+                </a:solidFill>
+                <a:latin typeface="微软雅黑"/>
+                <a:ea typeface="微软雅黑"/>
+              </a:rPr>
+              <a:t>14</a:t>
+            </a:r>
+          </a:p>
+        </p:txBody>
+      </p:sp>
+    </p:spTree>
+  </p:cSld>
+  <p:clrMapOvr>
+    <a:masterClrMapping/>
+  </p:clrMapOvr>
+</p:sld>
+</file>
+
+<file path=ppt/slides/slide21.xml><?xml version="1.0" encoding="utf-8"?>
+<p:sld xmlns:a="http://schemas.openxmlformats.org/drawingml/2006/main" xmlns:p="http://schemas.openxmlformats.org/presentationml/2006/main" xmlns:r="http://schemas.openxmlformats.org/officeDocument/2006/relationships">
+  <p:cSld>
+    <p:spTree>
+      <p:nvGrpSpPr>
+        <p:cNvPr id="1" name=""/>
+        <p:cNvGrpSpPr/>
+        <p:nvPr/>
+      </p:nvGrpSpPr>
+      <p:grpSpPr/>
+      <p:sp>
+        <p:nvSpPr>
+          <p:cNvPr id="2" name="Rectangle 1"/>
+          <p:cNvSpPr/>
+          <p:nvPr/>
+        </p:nvSpPr>
+        <p:spPr>
+          <a:xfrm>
+            <a:off x="-91440" y="-91440"/>
+            <a:ext cx="12435840" cy="7040880"/>
+          </a:xfrm>
+          <a:prstGeom prst="rect">
+            <a:avLst/>
+          </a:prstGeom>
+          <a:solidFill>
+            <a:srgbClr val="0F244E"/>
+          </a:solidFill>
+          <a:ln>
+            <a:noFill/>
+          </a:ln>
+          <a:effectLst/>
+        </p:spPr>
+        <p:style>
+          <a:lnRef idx="1">
+            <a:schemeClr val="accent1"/>
+          </a:lnRef>
+          <a:fillRef idx="3">
+            <a:schemeClr val="accent1"/>
+          </a:fillRef>
+          <a:effectRef idx="2">
+            <a:schemeClr val="accent1"/>
+          </a:effectRef>
+          <a:fontRef idx="minor">
+            <a:schemeClr val="lt1"/>
+          </a:fontRef>
+        </p:style>
+        <p:txBody>
+          <a:bodyPr rtlCol="0" anchor="ctr"/>
+          <a:lstStyle/>
+          <a:p>
+            <a:pPr algn="ctr"/>
+          </a:p>
+        </p:txBody>
+      </p:sp>
+      <p:sp>
+        <p:nvSpPr>
+          <p:cNvPr id="3" name="Rectangle 2"/>
+          <p:cNvSpPr/>
+          <p:nvPr/>
+        </p:nvSpPr>
+        <p:spPr>
+          <a:xfrm>
+            <a:off x="0" y="0"/>
+            <a:ext cx="4206240" cy="6858000"/>
+          </a:xfrm>
+          <a:prstGeom prst="rect">
+            <a:avLst/>
+          </a:prstGeom>
+          <a:solidFill>
+            <a:srgbClr val="1B3A6B"/>
+          </a:solidFill>
+          <a:ln>
+            <a:noFill/>
+          </a:ln>
+          <a:effectLst/>
+        </p:spPr>
+        <p:style>
+          <a:lnRef idx="1">
+            <a:schemeClr val="accent1"/>
+          </a:lnRef>
+          <a:fillRef idx="3">
+            <a:schemeClr val="accent1"/>
+          </a:fillRef>
+          <a:effectRef idx="2">
+            <a:schemeClr val="accent1"/>
+          </a:effectRef>
+          <a:fontRef idx="minor">
+            <a:schemeClr val="lt1"/>
+          </a:fontRef>
+        </p:style>
+        <p:txBody>
+          <a:bodyPr rtlCol="0" anchor="ctr"/>
+          <a:lstStyle/>
+          <a:p>
+            <a:pPr algn="ctr"/>
+          </a:p>
+        </p:txBody>
+      </p:sp>
+      <p:sp>
+        <p:nvSpPr>
+          <p:cNvPr id="4" name="Oval 3"/>
+          <p:cNvSpPr/>
+          <p:nvPr/>
+        </p:nvSpPr>
+        <p:spPr>
+          <a:xfrm>
+            <a:off x="822960" y="1828800"/>
+            <a:ext cx="822960" cy="822960"/>
+          </a:xfrm>
+          <a:prstGeom prst="ellipse">
+            <a:avLst/>
+          </a:prstGeom>
+          <a:solidFill>
+            <a:srgbClr val="F27E2D"/>
+          </a:solidFill>
+          <a:ln>
+            <a:noFill/>
+          </a:ln>
+          <a:effectLst/>
+        </p:spPr>
+        <p:style>
+          <a:lnRef idx="1">
+            <a:schemeClr val="accent1"/>
+          </a:lnRef>
+          <a:fillRef idx="3">
+            <a:schemeClr val="accent1"/>
+          </a:fillRef>
+          <a:effectRef idx="2">
+            <a:schemeClr val="accent1"/>
+          </a:effectRef>
+          <a:fontRef idx="minor">
+            <a:schemeClr val="lt1"/>
+          </a:fontRef>
+        </p:style>
+        <p:txBody>
+          <a:bodyPr rtlCol="0" anchor="ctr"/>
+          <a:lstStyle/>
+          <a:p>
+            <a:pPr algn="ctr"/>
+          </a:p>
+        </p:txBody>
+      </p:sp>
+      <p:sp>
+        <p:nvSpPr>
+          <p:cNvPr id="5" name="TextBox 4"/>
+          <p:cNvSpPr txBox="1"/>
+          <p:nvPr/>
+        </p:nvSpPr>
+        <p:spPr>
+          <a:xfrm>
+            <a:off x="822960" y="1828800"/>
+            <a:ext cx="822960" cy="822960"/>
+          </a:xfrm>
+          <a:prstGeom prst="rect">
+            <a:avLst/>
+          </a:prstGeom>
+          <a:noFill/>
+        </p:spPr>
+        <p:txBody>
+          <a:bodyPr wrap="square" anchor="ctr" lIns="0" rIns="0" tIns="0" bIns="0">
+            <a:spAutoFit/>
+          </a:bodyPr>
+          <a:lstStyle/>
+          <a:p>
+            <a:pPr algn="ctr">
+              <a:spcBef>
+                <a:spcPts val="0"/>
+              </a:spcBef>
+              <a:spcAft>
+                <a:spcPts val="300"/>
+              </a:spcAft>
+            </a:pPr>
+            <a:r>
+              <a:rPr sz="2600" b="1">
+                <a:solidFill>
+                  <a:srgbClr val="FFFFFF"/>
+                </a:solidFill>
+                <a:latin typeface="微软雅黑"/>
+                <a:ea typeface="微软雅黑"/>
+              </a:rPr>
+              <a:t>06</a:t>
+            </a:r>
+          </a:p>
+        </p:txBody>
+      </p:sp>
+      <p:sp>
+        <p:nvSpPr>
+          <p:cNvPr id="6" name="TextBox 5"/>
+          <p:cNvSpPr txBox="1"/>
+          <p:nvPr/>
+        </p:nvSpPr>
+        <p:spPr>
+          <a:xfrm>
+            <a:off x="822960" y="2880360"/>
+            <a:ext cx="3108960" cy="1463040"/>
+          </a:xfrm>
+          <a:prstGeom prst="rect">
+            <a:avLst/>
+          </a:prstGeom>
+          <a:noFill/>
+        </p:spPr>
+        <p:txBody>
+          <a:bodyPr wrap="square" anchor="t" lIns="0" rIns="0" tIns="0" bIns="0">
+            <a:spAutoFit/>
+          </a:bodyPr>
+          <a:lstStyle/>
+          <a:p>
+            <a:pPr algn="l">
+              <a:spcBef>
+                <a:spcPts val="0"/>
+              </a:spcBef>
+              <a:spcAft>
+                <a:spcPts val="300"/>
+              </a:spcAft>
+            </a:pPr>
+            <a:r>
+              <a:rPr sz="2800" b="1">
+                <a:solidFill>
+                  <a:srgbClr val="FFFFFF"/>
+                </a:solidFill>
+                <a:latin typeface="微软雅黑"/>
+                <a:ea typeface="微软雅黑"/>
+              </a:rPr>
+              <a:t>服务费用与价值</a:t>
+            </a:r>
+          </a:p>
+          <a:p>
+            <a:pPr algn="l">
+              <a:spcBef>
+                <a:spcPts val="0"/>
+              </a:spcBef>
+              <a:spcAft>
+                <a:spcPts val="0"/>
+              </a:spcAft>
+            </a:pPr>
+            <a:r>
+              <a:rPr sz="1150" b="0">
+                <a:solidFill>
+                  <a:srgbClr val="9FB2D0"/>
+                </a:solidFill>
+                <a:latin typeface="微软雅黑"/>
+                <a:ea typeface="微软雅黑"/>
+              </a:rPr>
+              <a:t>FEES &amp; VALUE</a:t>
+            </a:r>
+          </a:p>
+        </p:txBody>
+      </p:sp>
+      <p:sp>
+        <p:nvSpPr>
+          <p:cNvPr id="7" name="Oval 6"/>
+          <p:cNvSpPr/>
+          <p:nvPr/>
+        </p:nvSpPr>
+        <p:spPr>
+          <a:xfrm>
+            <a:off x="4937760" y="2029968"/>
+            <a:ext cx="146304" cy="146304"/>
+          </a:xfrm>
+          <a:prstGeom prst="ellipse">
+            <a:avLst/>
+          </a:prstGeom>
+          <a:solidFill>
+            <a:srgbClr val="F27E2D"/>
+          </a:solidFill>
+          <a:ln>
+            <a:noFill/>
+          </a:ln>
+          <a:effectLst/>
+        </p:spPr>
+        <p:style>
+          <a:lnRef idx="1">
+            <a:schemeClr val="accent1"/>
+          </a:lnRef>
+          <a:fillRef idx="3">
+            <a:schemeClr val="accent1"/>
+          </a:fillRef>
+          <a:effectRef idx="2">
+            <a:schemeClr val="accent1"/>
+          </a:effectRef>
+          <a:fontRef idx="minor">
+            <a:schemeClr val="lt1"/>
+          </a:fontRef>
+        </p:style>
+        <p:txBody>
+          <a:bodyPr rtlCol="0" anchor="ctr"/>
+          <a:lstStyle/>
+          <a:p>
+            <a:pPr algn="ctr"/>
+          </a:p>
+        </p:txBody>
+      </p:sp>
+      <p:sp>
+        <p:nvSpPr>
+          <p:cNvPr id="8" name="TextBox 7"/>
+          <p:cNvSpPr txBox="1"/>
+          <p:nvPr/>
+        </p:nvSpPr>
+        <p:spPr>
+          <a:xfrm>
+            <a:off x="5303520" y="1920240"/>
+            <a:ext cx="6309360" cy="548640"/>
+          </a:xfrm>
+          <a:prstGeom prst="rect">
+            <a:avLst/>
+          </a:prstGeom>
+          <a:noFill/>
+        </p:spPr>
+        <p:txBody>
+          <a:bodyPr wrap="square" anchor="t" lIns="0" rIns="0" tIns="0" bIns="0">
+            <a:spAutoFit/>
+          </a:bodyPr>
+          <a:lstStyle/>
+          <a:p>
+            <a:pPr algn="l">
+              <a:spcBef>
+                <a:spcPts val="0"/>
+              </a:spcBef>
+              <a:spcAft>
+                <a:spcPts val="300"/>
+              </a:spcAft>
+            </a:pPr>
+            <a:r>
+              <a:rPr sz="1400" b="0">
+                <a:solidFill>
+                  <a:srgbClr val="E5EBF5"/>
+                </a:solidFill>
+                <a:latin typeface="微软雅黑"/>
+                <a:ea typeface="微软雅黑"/>
+              </a:rPr>
+              <a:t>已取消月费(不签对赌), 让项目方更轻装</a:t>
+            </a:r>
+          </a:p>
+        </p:txBody>
+      </p:sp>
+      <p:sp>
+        <p:nvSpPr>
+          <p:cNvPr id="9" name="Oval 8"/>
+          <p:cNvSpPr/>
+          <p:nvPr/>
+        </p:nvSpPr>
+        <p:spPr>
+          <a:xfrm>
+            <a:off x="4937760" y="2706624"/>
+            <a:ext cx="146304" cy="146304"/>
+          </a:xfrm>
+          <a:prstGeom prst="ellipse">
+            <a:avLst/>
+          </a:prstGeom>
+          <a:solidFill>
+            <a:srgbClr val="F27E2D"/>
+          </a:solidFill>
+          <a:ln>
+            <a:noFill/>
+          </a:ln>
+          <a:effectLst/>
+        </p:spPr>
+        <p:style>
+          <a:lnRef idx="1">
+            <a:schemeClr val="accent1"/>
+          </a:lnRef>
+          <a:fillRef idx="3">
+            <a:schemeClr val="accent1"/>
+          </a:fillRef>
+          <a:effectRef idx="2">
+            <a:schemeClr val="accent1"/>
+          </a:effectRef>
+          <a:fontRef idx="minor">
+            <a:schemeClr val="lt1"/>
+          </a:fontRef>
+        </p:style>
+        <p:txBody>
+          <a:bodyPr rtlCol="0" anchor="ctr"/>
+          <a:lstStyle/>
+          <a:p>
+            <a:pPr algn="ctr"/>
+          </a:p>
+        </p:txBody>
+      </p:sp>
+      <p:sp>
+        <p:nvSpPr>
+          <p:cNvPr id="10" name="TextBox 9"/>
+          <p:cNvSpPr txBox="1"/>
+          <p:nvPr/>
+        </p:nvSpPr>
+        <p:spPr>
+          <a:xfrm>
+            <a:off x="5303520" y="2596896"/>
+            <a:ext cx="6309360" cy="548640"/>
+          </a:xfrm>
+          <a:prstGeom prst="rect">
+            <a:avLst/>
+          </a:prstGeom>
+          <a:noFill/>
+        </p:spPr>
+        <p:txBody>
+          <a:bodyPr wrap="square" anchor="t" lIns="0" rIns="0" tIns="0" bIns="0">
+            <a:spAutoFit/>
+          </a:bodyPr>
+          <a:lstStyle/>
+          <a:p>
+            <a:pPr algn="l">
+              <a:spcBef>
+                <a:spcPts val="0"/>
+              </a:spcBef>
+              <a:spcAft>
+                <a:spcPts val="300"/>
+              </a:spcAft>
+            </a:pPr>
+            <a:r>
+              <a:rPr sz="1400" b="0">
+                <a:solidFill>
+                  <a:srgbClr val="E5EBF5"/>
+                </a:solidFill>
+                <a:latin typeface="微软雅黑"/>
+                <a:ea typeface="微软雅黑"/>
+              </a:rPr>
+              <a:t>招商佣金:实际成交年租金的 1.5-2 个月</a:t>
+            </a:r>
+          </a:p>
+        </p:txBody>
+      </p:sp>
+      <p:sp>
+        <p:nvSpPr>
+          <p:cNvPr id="11" name="Oval 10"/>
+          <p:cNvSpPr/>
+          <p:nvPr/>
+        </p:nvSpPr>
+        <p:spPr>
+          <a:xfrm>
+            <a:off x="4937760" y="3383280"/>
+            <a:ext cx="146304" cy="146304"/>
+          </a:xfrm>
+          <a:prstGeom prst="ellipse">
+            <a:avLst/>
+          </a:prstGeom>
+          <a:solidFill>
+            <a:srgbClr val="F27E2D"/>
+          </a:solidFill>
+          <a:ln>
+            <a:noFill/>
+          </a:ln>
+          <a:effectLst/>
+        </p:spPr>
+        <p:style>
+          <a:lnRef idx="1">
+            <a:schemeClr val="accent1"/>
+          </a:lnRef>
+          <a:fillRef idx="3">
+            <a:schemeClr val="accent1"/>
+          </a:fillRef>
+          <a:effectRef idx="2">
+            <a:schemeClr val="accent1"/>
+          </a:effectRef>
+          <a:fontRef idx="minor">
+            <a:schemeClr val="lt1"/>
+          </a:fontRef>
+        </p:style>
+        <p:txBody>
+          <a:bodyPr rtlCol="0" anchor="ctr"/>
+          <a:lstStyle/>
+          <a:p>
+            <a:pPr algn="ctr"/>
+          </a:p>
+        </p:txBody>
+      </p:sp>
+      <p:sp>
+        <p:nvSpPr>
+          <p:cNvPr id="12" name="TextBox 11"/>
+          <p:cNvSpPr txBox="1"/>
+          <p:nvPr/>
+        </p:nvSpPr>
+        <p:spPr>
+          <a:xfrm>
+            <a:off x="5303520" y="3273552"/>
+            <a:ext cx="6309360" cy="548640"/>
+          </a:xfrm>
+          <a:prstGeom prst="rect">
+            <a:avLst/>
+          </a:prstGeom>
+          <a:noFill/>
+        </p:spPr>
+        <p:txBody>
+          <a:bodyPr wrap="square" anchor="t" lIns="0" rIns="0" tIns="0" bIns="0">
+            <a:spAutoFit/>
+          </a:bodyPr>
+          <a:lstStyle/>
+          <a:p>
+            <a:pPr algn="l">
+              <a:spcBef>
+                <a:spcPts val="0"/>
+              </a:spcBef>
+              <a:spcAft>
+                <a:spcPts val="300"/>
+              </a:spcAft>
+            </a:pPr>
+            <a:r>
+              <a:rPr sz="1400" b="0">
+                <a:solidFill>
+                  <a:srgbClr val="E5EBF5"/>
+                </a:solidFill>
+                <a:latin typeface="微软雅黑"/>
+                <a:ea typeface="微软雅黑"/>
+              </a:rPr>
+              <a:t>沙龙费一次性付清, 挂牌 10 万/项可选</a:t>
+            </a:r>
+          </a:p>
+        </p:txBody>
+      </p:sp>
+      <p:sp>
+        <p:nvSpPr>
+          <p:cNvPr id="13" name="Oval 12"/>
+          <p:cNvSpPr/>
+          <p:nvPr/>
+        </p:nvSpPr>
+        <p:spPr>
+          <a:xfrm>
+            <a:off x="4937760" y="4059936"/>
+            <a:ext cx="146304" cy="146304"/>
+          </a:xfrm>
+          <a:prstGeom prst="ellipse">
+            <a:avLst/>
+          </a:prstGeom>
+          <a:solidFill>
+            <a:srgbClr val="F27E2D"/>
+          </a:solidFill>
+          <a:ln>
+            <a:noFill/>
+          </a:ln>
+          <a:effectLst/>
+        </p:spPr>
+        <p:style>
+          <a:lnRef idx="1">
+            <a:schemeClr val="accent1"/>
+          </a:lnRef>
+          <a:fillRef idx="3">
+            <a:schemeClr val="accent1"/>
+          </a:fillRef>
+          <a:effectRef idx="2">
+            <a:schemeClr val="accent1"/>
+          </a:effectRef>
+          <a:fontRef idx="minor">
+            <a:schemeClr val="lt1"/>
+          </a:fontRef>
+        </p:style>
+        <p:txBody>
+          <a:bodyPr rtlCol="0" anchor="ctr"/>
+          <a:lstStyle/>
+          <a:p>
+            <a:pPr algn="ctr"/>
+          </a:p>
+        </p:txBody>
+      </p:sp>
+      <p:sp>
+        <p:nvSpPr>
+          <p:cNvPr id="14" name="TextBox 13"/>
+          <p:cNvSpPr txBox="1"/>
+          <p:nvPr/>
+        </p:nvSpPr>
+        <p:spPr>
+          <a:xfrm>
+            <a:off x="5303520" y="3950208"/>
+            <a:ext cx="6309360" cy="548640"/>
+          </a:xfrm>
+          <a:prstGeom prst="rect">
+            <a:avLst/>
+          </a:prstGeom>
+          <a:noFill/>
+        </p:spPr>
+        <p:txBody>
+          <a:bodyPr wrap="square" anchor="t" lIns="0" rIns="0" tIns="0" bIns="0">
+            <a:spAutoFit/>
+          </a:bodyPr>
+          <a:lstStyle/>
+          <a:p>
+            <a:pPr algn="l">
+              <a:spcBef>
+                <a:spcPts val="0"/>
+              </a:spcBef>
+              <a:spcAft>
+                <a:spcPts val="300"/>
+              </a:spcAft>
+            </a:pPr>
+            <a:r>
+              <a:rPr sz="1400" b="0">
+                <a:solidFill>
+                  <a:srgbClr val="E5EBF5"/>
+                </a:solidFill>
+                <a:latin typeface="微软雅黑"/>
+                <a:ea typeface="微软雅黑"/>
+              </a:rPr>
+              <a:t>对项目方:满租年租金 + 资产增值</a:t>
+            </a:r>
+          </a:p>
+        </p:txBody>
+      </p:sp>
+    </p:spTree>
+  </p:cSld>
+  <p:clrMapOvr>
+    <a:masterClrMapping/>
+  </p:clrMapOvr>
+</p:sld>
+</file>
+
+<file path=ppt/slides/slide22.xml><?xml version="1.0" encoding="utf-8"?>
+<p:sld xmlns:a="http://schemas.openxmlformats.org/drawingml/2006/main" xmlns:p="http://schemas.openxmlformats.org/presentationml/2006/main" xmlns:r="http://schemas.openxmlformats.org/officeDocument/2006/relationships">
+  <p:cSld>
+    <p:spTree>
+      <p:nvGrpSpPr>
+        <p:cNvPr id="1" name=""/>
+        <p:cNvGrpSpPr/>
+        <p:nvPr/>
+      </p:nvGrpSpPr>
+      <p:grpSpPr/>
+      <p:sp>
+        <p:nvSpPr>
+          <p:cNvPr id="2" name="Rectangle 1"/>
+          <p:cNvSpPr/>
+          <p:nvPr/>
+        </p:nvSpPr>
+        <p:spPr>
+          <a:xfrm>
+            <a:off x="-91440" y="-91440"/>
+            <a:ext cx="12435840" cy="7040880"/>
+          </a:xfrm>
+          <a:prstGeom prst="rect">
+            <a:avLst/>
+          </a:prstGeom>
+          <a:solidFill>
+            <a:srgbClr val="F4F6FA"/>
+          </a:solidFill>
+          <a:ln>
+            <a:noFill/>
+          </a:ln>
+          <a:effectLst/>
+        </p:spPr>
+        <p:style>
+          <a:lnRef idx="1">
+            <a:schemeClr val="accent1"/>
+          </a:lnRef>
+          <a:fillRef idx="3">
+            <a:schemeClr val="accent1"/>
+          </a:fillRef>
+          <a:effectRef idx="2">
+            <a:schemeClr val="accent1"/>
+          </a:effectRef>
+          <a:fontRef idx="minor">
+            <a:schemeClr val="lt1"/>
+          </a:fontRef>
+        </p:style>
+        <p:txBody>
+          <a:bodyPr rtlCol="0" anchor="ctr"/>
+          <a:lstStyle/>
+          <a:p>
+            <a:pPr algn="ctr"/>
+          </a:p>
+        </p:txBody>
+      </p:sp>
+      <p:sp>
+        <p:nvSpPr>
+          <p:cNvPr id="3" name="Rectangle 2"/>
+          <p:cNvSpPr/>
+          <p:nvPr/>
+        </p:nvSpPr>
+        <p:spPr>
+          <a:xfrm>
+            <a:off x="0" y="0"/>
+            <a:ext cx="12191695" cy="1051560"/>
+          </a:xfrm>
+          <a:prstGeom prst="rect">
+            <a:avLst/>
+          </a:prstGeom>
+          <a:solidFill>
+            <a:srgbClr val="0F244E"/>
+          </a:solidFill>
+          <a:ln>
+            <a:noFill/>
+          </a:ln>
+          <a:effectLst/>
+        </p:spPr>
+        <p:style>
+          <a:lnRef idx="1">
+            <a:schemeClr val="accent1"/>
+          </a:lnRef>
+          <a:fillRef idx="3">
+            <a:schemeClr val="accent1"/>
+          </a:fillRef>
+          <a:effectRef idx="2">
+            <a:schemeClr val="accent1"/>
+          </a:effectRef>
+          <a:fontRef idx="minor">
+            <a:schemeClr val="lt1"/>
+          </a:fontRef>
+        </p:style>
+        <p:txBody>
+          <a:bodyPr rtlCol="0" anchor="ctr"/>
+          <a:lstStyle/>
+          <a:p>
+            <a:pPr algn="ctr"/>
+          </a:p>
+        </p:txBody>
+      </p:sp>
+      <p:sp>
+        <p:nvSpPr>
+          <p:cNvPr id="4" name="Rectangle 3"/>
+          <p:cNvSpPr/>
+          <p:nvPr/>
+        </p:nvSpPr>
+        <p:spPr>
+          <a:xfrm>
+            <a:off x="0" y="1051560"/>
+            <a:ext cx="12191695" cy="54864"/>
+          </a:xfrm>
+          <a:prstGeom prst="rect">
+            <a:avLst/>
+          </a:prstGeom>
+          <a:solidFill>
+            <a:srgbClr val="F27E2D"/>
+          </a:solidFill>
+          <a:ln>
+            <a:noFill/>
+          </a:ln>
+          <a:effectLst/>
+        </p:spPr>
+        <p:style>
+          <a:lnRef idx="1">
+            <a:schemeClr val="accent1"/>
+          </a:lnRef>
+          <a:fillRef idx="3">
+            <a:schemeClr val="accent1"/>
+          </a:fillRef>
+          <a:effectRef idx="2">
+            <a:schemeClr val="accent1"/>
+          </a:effectRef>
+          <a:fontRef idx="minor">
+            <a:schemeClr val="lt1"/>
+          </a:fontRef>
+        </p:style>
+        <p:txBody>
+          <a:bodyPr rtlCol="0" anchor="ctr"/>
+          <a:lstStyle/>
+          <a:p>
+            <a:pPr algn="ctr"/>
+          </a:p>
+        </p:txBody>
+      </p:sp>
+      <p:sp>
+        <p:nvSpPr>
+          <p:cNvPr id="5" name="Rectangle 4"/>
+          <p:cNvSpPr/>
+          <p:nvPr/>
+        </p:nvSpPr>
+        <p:spPr>
+          <a:xfrm>
+            <a:off x="502920" y="237744"/>
+            <a:ext cx="109728" cy="566928"/>
+          </a:xfrm>
+          <a:prstGeom prst="rect">
+            <a:avLst/>
+          </a:prstGeom>
+          <a:solidFill>
+            <a:srgbClr val="F27E2D"/>
+          </a:solidFill>
+          <a:ln>
+            <a:noFill/>
+          </a:ln>
+          <a:effectLst/>
+        </p:spPr>
+        <p:style>
+          <a:lnRef idx="1">
+            <a:schemeClr val="accent1"/>
+          </a:lnRef>
+          <a:fillRef idx="3">
+            <a:schemeClr val="accent1"/>
+          </a:fillRef>
+          <a:effectRef idx="2">
+            <a:schemeClr val="accent1"/>
+          </a:effectRef>
+          <a:fontRef idx="minor">
+            <a:schemeClr val="lt1"/>
+          </a:fontRef>
+        </p:style>
+        <p:txBody>
+          <a:bodyPr rtlCol="0" anchor="ctr"/>
+          <a:lstStyle/>
+          <a:p>
+            <a:pPr algn="ctr"/>
+          </a:p>
+        </p:txBody>
+      </p:sp>
+      <p:sp>
+        <p:nvSpPr>
+          <p:cNvPr id="6" name="TextBox 5"/>
+          <p:cNvSpPr txBox="1"/>
+          <p:nvPr/>
+        </p:nvSpPr>
+        <p:spPr>
+          <a:xfrm>
+            <a:off x="777240" y="182880"/>
+            <a:ext cx="10241280" cy="310896"/>
+          </a:xfrm>
+          <a:prstGeom prst="rect">
+            <a:avLst/>
+          </a:prstGeom>
+          <a:noFill/>
+        </p:spPr>
+        <p:txBody>
+          <a:bodyPr wrap="square" anchor="t" lIns="0" rIns="0" tIns="0" bIns="0">
+            <a:spAutoFit/>
+          </a:bodyPr>
+          <a:lstStyle/>
+          <a:p>
+            <a:pPr algn="l">
+              <a:spcBef>
+                <a:spcPts val="0"/>
+              </a:spcBef>
+              <a:spcAft>
+                <a:spcPts val="300"/>
+              </a:spcAft>
+            </a:pPr>
+            <a:r>
+              <a:rPr sz="1100" b="0">
+                <a:solidFill>
+                  <a:srgbClr val="B9C6DC"/>
+                </a:solidFill>
+                <a:latin typeface="微软雅黑"/>
+                <a:ea typeface="微软雅黑"/>
+              </a:rPr>
+              <a:t>06 · 服务费用与价值</a:t>
+            </a:r>
+          </a:p>
+        </p:txBody>
+      </p:sp>
+      <p:sp>
+        <p:nvSpPr>
+          <p:cNvPr id="7" name="TextBox 6"/>
+          <p:cNvSpPr txBox="1"/>
+          <p:nvPr/>
+        </p:nvSpPr>
+        <p:spPr>
+          <a:xfrm>
+            <a:off x="777240" y="420624"/>
+            <a:ext cx="10424160" cy="548640"/>
+          </a:xfrm>
+          <a:prstGeom prst="rect">
+            <a:avLst/>
+          </a:prstGeom>
+          <a:noFill/>
+        </p:spPr>
+        <p:txBody>
+          <a:bodyPr wrap="square" anchor="t" lIns="0" rIns="0" tIns="0" bIns="0">
+            <a:spAutoFit/>
+          </a:bodyPr>
+          <a:lstStyle/>
+          <a:p>
+            <a:pPr algn="l">
+              <a:spcBef>
+                <a:spcPts val="0"/>
+              </a:spcBef>
+              <a:spcAft>
+                <a:spcPts val="300"/>
+              </a:spcAft>
+            </a:pPr>
+            <a:r>
+              <a:rPr sz="2200" b="1">
+                <a:solidFill>
+                  <a:srgbClr val="FFFFFF"/>
+                </a:solidFill>
+                <a:latin typeface="微软雅黑"/>
+                <a:ea typeface="微软雅黑"/>
+              </a:rPr>
+              <a:t>服务费用构成(已取消月费 · 不签对赌)</a:t>
+            </a:r>
+          </a:p>
+        </p:txBody>
+      </p:sp>
+      <p:sp>
+        <p:nvSpPr>
+          <p:cNvPr id="8" name="TextBox 7"/>
+          <p:cNvSpPr txBox="1"/>
+          <p:nvPr/>
+        </p:nvSpPr>
+        <p:spPr>
+          <a:xfrm>
+            <a:off x="9509760" y="182880"/>
+            <a:ext cx="2194560" cy="731520"/>
+          </a:xfrm>
+          <a:prstGeom prst="rect">
+            <a:avLst/>
+          </a:prstGeom>
+          <a:noFill/>
+        </p:spPr>
+        <p:txBody>
+          <a:bodyPr wrap="square" anchor="t" lIns="0" rIns="0" tIns="0" bIns="0">
+            <a:spAutoFit/>
+          </a:bodyPr>
+          <a:lstStyle/>
+          <a:p>
+            <a:pPr algn="r">
+              <a:spcBef>
+                <a:spcPts val="0"/>
+              </a:spcBef>
+              <a:spcAft>
+                <a:spcPts val="300"/>
+              </a:spcAft>
+            </a:pPr>
+            <a:r>
+              <a:rPr sz="1150" b="1">
+                <a:solidFill>
+                  <a:srgbClr val="E8C87A"/>
+                </a:solidFill>
+                <a:latin typeface="微软雅黑"/>
+                <a:ea typeface="微软雅黑"/>
+              </a:rPr>
+              <a:t>元谷 YUANGU</a:t>
+            </a:r>
+          </a:p>
+          <a:p>
+            <a:pPr algn="r">
+              <a:spcBef>
+                <a:spcPts val="0"/>
+              </a:spcBef>
+              <a:spcAft>
+                <a:spcPts val="300"/>
+              </a:spcAft>
+            </a:pPr>
+            <a:r>
+              <a:rPr sz="850" b="0">
+                <a:solidFill>
+                  <a:srgbClr val="B9C6DC"/>
+                </a:solidFill>
+                <a:latin typeface="微软雅黑"/>
+                <a:ea typeface="微软雅黑"/>
+              </a:rPr>
+              <a:t>胡教授团队 · 第三方服务</a:t>
+            </a:r>
+          </a:p>
+        </p:txBody>
+      </p:sp>
+      <p:graphicFrame>
+        <p:nvGraphicFramePr>
+          <p:cNvPr id="9" name="Table 8"/>
+          <p:cNvGraphicFramePr>
+            <a:graphicFrameLocks noGrp="1"/>
+          </p:cNvGraphicFramePr>
+          <p:nvPr/>
+        </p:nvGraphicFramePr>
+        <p:xfrm>
           <a:off x="640080" y="1371600"/>
-          <a:ext cx="10927080" cy="2651760"/>
+          <a:ext cx="10927080" cy="2944368"/>
         </p:xfrm>
         <a:graphic>
           <a:graphicData uri="http://schemas.openxmlformats.org/drawingml/2006/table">
@@ -18972,7 +21053,7 @@
                   </a:tcPr>
                 </a:tc>
               </a:tr>
-              <a:tr h="566928">
+              <a:tr h="512064">
                 <a:tc>
                   <a:txBody>
                     <a:bodyPr/>
@@ -19043,7 +21124,7 @@
                   </a:tcPr>
                 </a:tc>
               </a:tr>
-              <a:tr h="566928">
+              <a:tr h="512064">
                 <a:tc>
                   <a:txBody>
                     <a:bodyPr/>
@@ -19114,7 +21195,7 @@
                   </a:tcPr>
                 </a:tc>
               </a:tr>
-              <a:tr h="566928">
+              <a:tr h="512064">
                 <a:tc>
                   <a:txBody>
                     <a:bodyPr/>
@@ -19185,7 +21266,7 @@
                   </a:tcPr>
                 </a:tc>
               </a:tr>
-              <a:tr h="566928">
+              <a:tr h="512064">
                 <a:tc>
                   <a:txBody>
                     <a:bodyPr/>
@@ -19199,7 +21280,7 @@
                           <a:latin typeface="微软雅黑"/>
                           <a:ea typeface="微软雅黑"/>
                         </a:rPr>
-                        <a:t>超额奖励(适度)</a:t>
+                        <a:t>媒体宣传(可选模块)</a:t>
                       </a:r>
                     </a:p>
                   </a:txBody>
@@ -19222,7 +21303,7 @@
                           <a:latin typeface="微软雅黑"/>
                           <a:ea typeface="微软雅黑"/>
                         </a:rPr>
-                        <a:t>满租率 ≥ 90% 后给予, 金额适度</a:t>
+                        <a:t>原创 3 篇 5 万(曝光≥150万)+ 主流媒体宣发 + 社交投放</a:t>
                       </a:r>
                     </a:p>
                   </a:txBody>
@@ -19245,7 +21326,7 @@
                           <a:latin typeface="微软雅黑"/>
                           <a:ea typeface="微软雅黑"/>
                         </a:rPr>
-                        <a:t>正常分期支付(不要求一次性)</a:t>
+                        <a:t>按服务包结算(详见媒体方案)</a:t>
                       </a:r>
                     </a:p>
                   </a:txBody>
@@ -19256,6 +21337,77 @@
                   </a:tcPr>
                 </a:tc>
               </a:tr>
+              <a:tr h="512064">
+                <a:tc>
+                  <a:txBody>
+                    <a:bodyPr/>
+                    <a:lstStyle/>
+                    <a:p>
+                      <a:r>
+                        <a:rPr sz="1050" b="1">
+                          <a:solidFill>
+                            <a:srgbClr val="0F244E"/>
+                          </a:solidFill>
+                          <a:latin typeface="微软雅黑"/>
+                          <a:ea typeface="微软雅黑"/>
+                        </a:rPr>
+                        <a:t>超额奖励(适度)</a:t>
+                      </a:r>
+                    </a:p>
+                  </a:txBody>
+                  <a:tcPr marL="91440" marR="54864" marT="9144" marB="9144" anchor="ctr">
+                    <a:solidFill>
+                      <a:srgbClr val="FFFFFF"/>
+                    </a:solidFill>
+                  </a:tcPr>
+                </a:tc>
+                <a:tc>
+                  <a:txBody>
+                    <a:bodyPr/>
+                    <a:lstStyle/>
+                    <a:p>
+                      <a:r>
+                        <a:rPr sz="1050" b="0">
+                          <a:solidFill>
+                            <a:srgbClr val="212B42"/>
+                          </a:solidFill>
+                          <a:latin typeface="微软雅黑"/>
+                          <a:ea typeface="微软雅黑"/>
+                        </a:rPr>
+                        <a:t>满租率 ≥ 90% 后给予, 金额适度</a:t>
+                      </a:r>
+                    </a:p>
+                  </a:txBody>
+                  <a:tcPr marL="91440" marR="54864" marT="9144" marB="9144" anchor="ctr">
+                    <a:solidFill>
+                      <a:srgbClr val="FFFFFF"/>
+                    </a:solidFill>
+                  </a:tcPr>
+                </a:tc>
+                <a:tc>
+                  <a:txBody>
+                    <a:bodyPr/>
+                    <a:lstStyle/>
+                    <a:p>
+                      <a:r>
+                        <a:rPr sz="1050" b="0">
+                          <a:solidFill>
+                            <a:srgbClr val="212B42"/>
+                          </a:solidFill>
+                          <a:latin typeface="微软雅黑"/>
+                          <a:ea typeface="微软雅黑"/>
+                        </a:rPr>
+                        <a:t>正常分期支付(不要求一次性)</a:t>
+                      </a:r>
+                    </a:p>
+                  </a:txBody>
+                  <a:tcPr marL="91440" marR="54864" marT="9144" marB="9144" anchor="ctr">
+                    <a:solidFill>
+                      <a:srgbClr val="FFFFFF"/>
+                    </a:solidFill>
+                  </a:tcPr>
+                </a:tc>
+              </a:tr>
             </a:tbl>
           </a:graphicData>
         </a:graphic>
@@ -19498,7 +21650,7 @@
                 <a:latin typeface="微软雅黑"/>
                 <a:ea typeface="微软雅黑"/>
               </a:rPr>
-              <a:t>13</a:t>
+              <a:t>15</a:t>
             </a:r>
           </a:p>
         </p:txBody>
@@ -19511,7 +21663,7 @@
 </p:sld>
 </file>
 
-<file path=ppt/slides/slide21.xml><?xml version="1.0" encoding="utf-8"?>
+<file path=ppt/slides/slide23.xml><?xml version="1.0" encoding="utf-8"?>
 <p:sld xmlns:a="http://schemas.openxmlformats.org/drawingml/2006/main" xmlns:p="http://schemas.openxmlformats.org/presentationml/2006/main" xmlns:r="http://schemas.openxmlformats.org/officeDocument/2006/relationships">
   <p:cSld>
     <p:spTree>
@@ -21075,7 +23227,7 @@
                 <a:latin typeface="微软雅黑"/>
                 <a:ea typeface="微软雅黑"/>
               </a:rPr>
-              <a:t>14</a:t>
+              <a:t>16</a:t>
             </a:r>
           </a:p>
         </p:txBody>
@@ -21088,7 +23240,7 @@
 </p:sld>
 </file>
 
-<file path=ppt/slides/slide22.xml><?xml version="1.0" encoding="utf-8"?>
+<file path=ppt/slides/slide24.xml><?xml version="1.0" encoding="utf-8"?>
 <p:sld xmlns:a="http://schemas.openxmlformats.org/drawingml/2006/main" xmlns:p="http://schemas.openxmlformats.org/presentationml/2006/main" xmlns:r="http://schemas.openxmlformats.org/officeDocument/2006/relationships">
   <p:cSld>
     <p:spTree>
@@ -21920,7 +24072,7 @@
                 <a:latin typeface="微软雅黑"/>
                 <a:ea typeface="微软雅黑"/>
               </a:rPr>
-              <a:t>15</a:t>
+              <a:t>17</a:t>
             </a:r>
           </a:p>
         </p:txBody>
@@ -21933,7 +24085,7 @@
 </p:sld>
 </file>
 
-<file path=ppt/slides/slide23.xml><?xml version="1.0" encoding="utf-8"?>
+<file path=ppt/slides/slide25.xml><?xml version="1.0" encoding="utf-8"?>
 <p:sld xmlns:a="http://schemas.openxmlformats.org/drawingml/2006/main" xmlns:p="http://schemas.openxmlformats.org/presentationml/2006/main" xmlns:r="http://schemas.openxmlformats.org/officeDocument/2006/relationships">
   <p:cSld>
     <p:spTree>
